--- a/03-build/pptx/C6plus_U4_alumno.pptx
+++ b/03-build/pptx/C6plus_U4_alumno.pptx
@@ -4639,7 +4639,6 @@
               <a:srgbClr val="E4E3DE"/>
             </a:solidFill>
           </a:ln>
-          <a:effectLst/>
           <a:effectLst>
             <a:outerShdw blurRad="90000" dist="38000" dir="5400000" rotWithShape="0">
               <a:srgbClr val="20242E">
@@ -4873,7 +4872,6 @@
               <a:srgbClr val="E4E3DE"/>
             </a:solidFill>
           </a:ln>
-          <a:effectLst/>
           <a:effectLst>
             <a:outerShdw blurRad="90000" dist="38000" dir="5400000" rotWithShape="0">
               <a:srgbClr val="20242E">
@@ -5107,7 +5105,6 @@
               <a:srgbClr val="E4E3DE"/>
             </a:solidFill>
           </a:ln>
-          <a:effectLst/>
           <a:effectLst>
             <a:outerShdw blurRad="90000" dist="38000" dir="5400000" rotWithShape="0">
               <a:srgbClr val="20242E">
@@ -5341,7 +5338,6 @@
               <a:srgbClr val="E4E3DE"/>
             </a:solidFill>
           </a:ln>
-          <a:effectLst/>
           <a:effectLst>
             <a:outerShdw blurRad="90000" dist="38000" dir="5400000" rotWithShape="0">
               <a:srgbClr val="20242E">
@@ -13572,7 +13568,6 @@
               <a:srgbClr val="E4E3DE"/>
             </a:solidFill>
           </a:ln>
-          <a:effectLst/>
           <a:effectLst>
             <a:outerShdw blurRad="90000" dist="38000" dir="5400000" rotWithShape="0">
               <a:srgbClr val="20242E">
@@ -14251,7 +14246,6 @@
               <a:srgbClr val="7C56A9"/>
             </a:solidFill>
           </a:ln>
-          <a:effectLst/>
           <a:effectLst>
             <a:outerShdw blurRad="90000" dist="38000" dir="5400000" rotWithShape="0">
               <a:srgbClr val="20242E">
@@ -21169,7 +21163,6 @@
               <a:srgbClr val="7C56A9"/>
             </a:solidFill>
           </a:ln>
-          <a:effectLst/>
           <a:effectLst>
             <a:outerShdw blurRad="90000" dist="38000" dir="5400000" rotWithShape="0">
               <a:srgbClr val="20242E">
@@ -21403,7 +21396,6 @@
               <a:srgbClr val="7C56A9"/>
             </a:solidFill>
           </a:ln>
-          <a:effectLst/>
           <a:effectLst>
             <a:outerShdw blurRad="90000" dist="38000" dir="5400000" rotWithShape="0">
               <a:srgbClr val="20242E">
@@ -21637,7 +21629,6 @@
               <a:srgbClr val="7C56A9"/>
             </a:solidFill>
           </a:ln>
-          <a:effectLst/>
           <a:effectLst>
             <a:outerShdw blurRad="90000" dist="38000" dir="5400000" rotWithShape="0">
               <a:srgbClr val="20242E">
@@ -27015,7 +27006,6 @@
               <a:srgbClr val="7C56A9"/>
             </a:solidFill>
           </a:ln>
-          <a:effectLst/>
           <a:effectLst>
             <a:outerShdw blurRad="90000" dist="38000" dir="5400000" rotWithShape="0">
               <a:srgbClr val="20242E">
@@ -27318,7 +27308,6 @@
               <a:srgbClr val="7C56A9"/>
             </a:solidFill>
           </a:ln>
-          <a:effectLst/>
           <a:effectLst>
             <a:outerShdw blurRad="90000" dist="38000" dir="5400000" rotWithShape="0">
               <a:srgbClr val="20242E">
@@ -27621,7 +27610,6 @@
               <a:srgbClr val="7C56A9"/>
             </a:solidFill>
           </a:ln>
-          <a:effectLst/>
           <a:effectLst>
             <a:outerShdw blurRad="90000" dist="38000" dir="5400000" rotWithShape="0">
               <a:srgbClr val="20242E">
@@ -27924,7 +27912,6 @@
               <a:srgbClr val="7C56A9"/>
             </a:solidFill>
           </a:ln>
-          <a:effectLst/>
           <a:effectLst>
             <a:outerShdw blurRad="90000" dist="38000" dir="5400000" rotWithShape="0">
               <a:srgbClr val="20242E">
@@ -28227,7 +28214,6 @@
               <a:srgbClr val="7C56A9"/>
             </a:solidFill>
           </a:ln>
-          <a:effectLst/>
           <a:effectLst>
             <a:outerShdw blurRad="90000" dist="38000" dir="5400000" rotWithShape="0">
               <a:srgbClr val="20242E">
@@ -28530,7 +28516,6 @@
               <a:srgbClr val="5B3E83"/>
             </a:solidFill>
           </a:ln>
-          <a:effectLst/>
           <a:effectLst>
             <a:outerShdw blurRad="90000" dist="38000" dir="5400000" rotWithShape="0">
               <a:srgbClr val="20242E">
@@ -28833,7 +28818,6 @@
               <a:srgbClr val="5B3E83"/>
             </a:solidFill>
           </a:ln>
-          <a:effectLst/>
           <a:effectLst>
             <a:outerShdw blurRad="90000" dist="38000" dir="5400000" rotWithShape="0">
               <a:srgbClr val="20242E">
@@ -29136,7 +29120,6 @@
               <a:srgbClr val="5B3E83"/>
             </a:solidFill>
           </a:ln>
-          <a:effectLst/>
           <a:effectLst>
             <a:outerShdw blurRad="90000" dist="38000" dir="5400000" rotWithShape="0">
               <a:srgbClr val="20242E">
@@ -29963,7 +29946,6 @@
           <a:ln>
             <a:noFill/>
           </a:ln>
-          <a:effectLst/>
           <a:effectLst>
             <a:outerShdw blurRad="90000" dist="38000" dir="5400000" rotWithShape="0">
               <a:srgbClr val="20242E">
@@ -35462,7 +35444,6 @@
           <a:ln>
             <a:noFill/>
           </a:ln>
-          <a:effectLst/>
           <a:effectLst>
             <a:outerShdw blurRad="90000" dist="38000" dir="5400000" rotWithShape="0">
               <a:srgbClr val="20242E">
@@ -42695,7 +42676,6 @@
           <a:ln>
             <a:noFill/>
           </a:ln>
-          <a:effectLst/>
           <a:effectLst>
             <a:outerShdw blurRad="90000" dist="38000" dir="5400000" rotWithShape="0">
               <a:srgbClr val="20242E">
@@ -42820,7 +42800,6 @@
           <a:ln>
             <a:noFill/>
           </a:ln>
-          <a:effectLst/>
           <a:effectLst>
             <a:outerShdw blurRad="90000" dist="38000" dir="5400000" rotWithShape="0">
               <a:srgbClr val="20242E">
@@ -46947,7 +46926,6 @@
               <a:srgbClr val="7C56A9"/>
             </a:solidFill>
           </a:ln>
-          <a:effectLst/>
           <a:effectLst>
             <a:outerShdw blurRad="90000" dist="38000" dir="5400000" rotWithShape="0">
               <a:srgbClr val="20242E">

--- a/03-build/pptx/C6plus_U4_alumno.pptx
+++ b/03-build/pptx/C6plus_U4_alumno.pptx
@@ -11,6 +11,9 @@
     <p:sldId id="259" r:id="rId10"/>
     <p:sldId id="260" r:id="rId11"/>
     <p:sldId id="261" r:id="rId12"/>
+    <p:sldId id="276" r:id="rId27"/>
+    <p:sldId id="277" r:id="rId28"/>
+    <p:sldId id="278" r:id="rId29"/>
     <p:sldId id="262" r:id="rId13"/>
     <p:sldId id="263" r:id="rId14"/>
     <p:sldId id="264" r:id="rId15"/>
@@ -124,6 +127,255 @@
     </a:lvl9pPr>
   </p:defaultTextStyle>
 </p:presentation>
+</file>
+
+<file path=ppt/notesSlides/notesSlide1.xml><?xml version="1.0" encoding="utf-8"?>
+<p:notes xmlns:a="http://schemas.openxmlformats.org/drawingml/2006/main" xmlns:p="http://schemas.openxmlformats.org/presentationml/2006/main" xmlns:r="http://schemas.openxmlformats.org/officeDocument/2006/relationships">
+  <p:cSld>
+    <p:spTree>
+      <p:nvGrpSpPr>
+        <p:cNvPr id="1" name=""/>
+        <p:cNvGrpSpPr/>
+        <p:nvPr/>
+      </p:nvGrpSpPr>
+      <p:grpSpPr>
+        <a:xfrm>
+          <a:off x="0" y="0"/>
+          <a:ext cx="0" cy="0"/>
+          <a:chOff x="0" y="0"/>
+          <a:chExt cx="0" cy="0"/>
+        </a:xfrm>
+      </p:grpSpPr>
+      <p:sp>
+        <p:nvSpPr>
+          <p:cNvPr id="2" name="Slide Image Placeholder 1"/>
+          <p:cNvSpPr>
+            <a:spLocks noGrp="1"/>
+          </p:cNvSpPr>
+          <p:nvPr>
+            <p:ph type="sldImg" idx="2"/>
+          </p:nvPr>
+        </p:nvSpPr>
+        <p:spPr/>
+      </p:sp>
+      <p:sp>
+        <p:nvSpPr>
+          <p:cNvPr id="3" name="Notes Placeholder 2"/>
+          <p:cNvSpPr>
+            <a:spLocks noGrp="1"/>
+          </p:cNvSpPr>
+          <p:nvPr>
+            <p:ph type="body" idx="3" sz="quarter"/>
+          </p:nvPr>
+        </p:nvSpPr>
+        <p:spPr/>
+        <p:txBody>
+          <a:bodyPr/>
+          <a:lstStyle/>
+          <a:p>
+            <a:r>
+              <a:t>RETO 1 · El vuelo cancelado — ⚖️ onderhandeling &amp; dilemma</a:t>
+            </a:r>
+          </a:p>
+          <a:p>
+            <a:r>
+              <a:t>OPDRACHT: Onderhandel over een oplossing. Elk heeft een geheime instructie.</a:t>
+            </a:r>
+          </a:p>
+          <a:p>
+            <a:r>
+              <a:t>DE REGEL: Je geheime instructie mag je niet voorlezen en niet vertalen — je moet ernaar hándelen. En niemand mag de stem verheffen: dit is een balie, geen ruzie.</a:t>
+            </a:r>
+          </a:p>
+          <a:p>
+            <a:r>
+              <a:t>VERLOOP: Repartid los papeles y leed la instrucción en secreto. | El pasajero empieza. El mostrador escucha antes de contestar. | Negociad hasta un acuerdo, o hasta el bloqueo. | Contad a la clase qué habéis acordado y por qué.</a:t>
+            </a:r>
+          </a:p>
+          <a:p>
+            <a:r>
+              <a:t>SLEUTEL: De sleutel zit in de tweede instructie van de balie: er zijn twee plaatsen, maar alleen voor dringende gevallen. De passagier moet dus zijn examen noemen — en dat is een spreekhandeling, geen woordenschatoefening.  ||  «Lo que sí puedo hacer es…» is de belangrijkste chunk aan de baliekant: iets weigeren en tegelijk een uitweg bieden.  ||  De impasse is een geldig einde. Twee duo's die vastlopen maar beleefd blijven, hebben de reto beter gedaan dan een duo dat meteen alles krijgt.  ||  Toets de spreekhandelingen (klacht formuleren, alternatief vragen, weigeren met uitweg), niet wie wint.</a:t>
+            </a:r>
+          </a:p>
+          <a:p>
+            <a:r>
+              <a:t>NOTA: Draai daarna de rollen om met dezelfde instructies. De tweede ronde is altijd beter, en de klas hoort dat zelf.</a:t>
+            </a:r>
+          </a:p>
+        </p:txBody>
+      </p:sp>
+    </p:spTree>
+  </p:cSld>
+  <p:clrMapOvr>
+    <a:masterClrMapping/>
+  </p:clrMapOvr>
+</p:notes>
+</file>
+
+<file path=ppt/notesSlides/notesSlide2.xml><?xml version="1.0" encoding="utf-8"?>
+<p:notes xmlns:a="http://schemas.openxmlformats.org/drawingml/2006/main" xmlns:p="http://schemas.openxmlformats.org/presentationml/2006/main" xmlns:r="http://schemas.openxmlformats.org/officeDocument/2006/relationships">
+  <p:cSld>
+    <p:spTree>
+      <p:nvGrpSpPr>
+        <p:cNvPr id="1" name=""/>
+        <p:cNvGrpSpPr/>
+        <p:nvPr/>
+      </p:nvGrpSpPr>
+      <p:grpSpPr>
+        <a:xfrm>
+          <a:off x="0" y="0"/>
+          <a:ext cx="0" cy="0"/>
+          <a:chOff x="0" y="0"/>
+          <a:chExt cx="0" cy="0"/>
+        </a:xfrm>
+      </p:grpSpPr>
+      <p:sp>
+        <p:nvSpPr>
+          <p:cNvPr id="2" name="Slide Image Placeholder 1"/>
+          <p:cNvSpPr>
+            <a:spLocks noGrp="1"/>
+          </p:cNvSpPr>
+          <p:nvPr>
+            <p:ph type="sldImg" idx="2"/>
+          </p:nvPr>
+        </p:nvSpPr>
+        <p:spPr/>
+      </p:sp>
+      <p:sp>
+        <p:nvSpPr>
+          <p:cNvPr id="3" name="Notes Placeholder 2"/>
+          <p:cNvSpPr>
+            <a:spLocks noGrp="1"/>
+          </p:cNvSpPr>
+          <p:nvPr>
+            <p:ph type="body" idx="3" sz="quarter"/>
+          </p:nvPr>
+        </p:nvSpPr>
+        <p:spPr/>
+        <p:txBody>
+          <a:bodyPr/>
+          <a:lstStyle/>
+          <a:p>
+            <a:r>
+              <a:t>RETO 3 · Presupuesto de mochilero — 🔬 onderzoek &amp; data</a:t>
+            </a:r>
+          </a:p>
+          <a:p>
+            <a:r>
+              <a:t>OPDRACHT: Stel de reis samen binnen het budget en verantwoord elke uitgave met por of para.</a:t>
+            </a:r>
+          </a:p>
+          <a:p>
+            <a:r>
+              <a:t>DE REGEL: Zeshonderd euro, geen cent meer, en tien nachten moeten gedekt zijn. Elke uitgave wordt verantwoord met «por» (het bedrag, de ruil) of «para» (het doel).</a:t>
+            </a:r>
+          </a:p>
+          <a:p>
+            <a:r>
+              <a:t>VERLOOP: Mirad los precios de los tres países. | Decidid la ruta y contad las noches. | Justificad cada gasto con por o para. | ¿Cabe en 600 €? Si no, ¿qué quitáis?</a:t>
+            </a:r>
+          </a:p>
+          <a:p>
+            <a:r>
+              <a:t>SLEUTEL: Het budget klopt alleen als de groep tijd inruilt tegen geld: de bus van tien uur in plaats van de binnenlandse vlucht. Dat is de kern van backpacken en meteen de beste «por»-zin: «cambiamos el vuelo por el bus».  ||  Chili is bijna dubbel zo duur als Bolivia. Wie de route van zuid naar noord legt, houdt geld over voor de parken; omgekeerd niet.  ||  «Por» voor het bedrag en de ruil, «para» voor het doel — het budget maakt dat verschil concreet in plaats van abstract.  ||  Toets de tien gedekte nachten, het bedrag, en of elke uitgave een por- of para-zin heeft.</a:t>
+            </a:r>
+          </a:p>
+          <a:p>
+            <a:r>
+              <a:t>NOTA: Prijzen zijn ordes van grootte. Wie actuele prijzen opzoekt, mag ze gebruiken — dan wordt de oefening alleen maar echter.</a:t>
+            </a:r>
+          </a:p>
+        </p:txBody>
+      </p:sp>
+    </p:spTree>
+  </p:cSld>
+  <p:clrMapOvr>
+    <a:masterClrMapping/>
+  </p:clrMapOvr>
+</p:notes>
+</file>
+
+<file path=ppt/notesSlides/notesSlide3.xml><?xml version="1.0" encoding="utf-8"?>
+<p:notes xmlns:a="http://schemas.openxmlformats.org/drawingml/2006/main" xmlns:p="http://schemas.openxmlformats.org/presentationml/2006/main" xmlns:r="http://schemas.openxmlformats.org/officeDocument/2006/relationships">
+  <p:cSld>
+    <p:spTree>
+      <p:nvGrpSpPr>
+        <p:cNvPr id="1" name=""/>
+        <p:cNvGrpSpPr/>
+        <p:nvPr/>
+      </p:nvGrpSpPr>
+      <p:grpSpPr>
+        <a:xfrm>
+          <a:off x="0" y="0"/>
+          <a:ext cx="0" cy="0"/>
+          <a:chOff x="0" y="0"/>
+          <a:chExt cx="0" cy="0"/>
+        </a:xfrm>
+      </p:grpSpPr>
+      <p:sp>
+        <p:nvSpPr>
+          <p:cNvPr id="2" name="Slide Image Placeholder 1"/>
+          <p:cNvSpPr>
+            <a:spLocks noGrp="1"/>
+          </p:cNvSpPr>
+          <p:nvPr>
+            <p:ph type="sldImg" idx="2"/>
+          </p:nvPr>
+        </p:nvSpPr>
+        <p:spPr/>
+      </p:sp>
+      <p:sp>
+        <p:nvSpPr>
+          <p:cNvPr id="3" name="Notes Placeholder 2"/>
+          <p:cNvSpPr>
+            <a:spLocks noGrp="1"/>
+          </p:cNvSpPr>
+          <p:nvPr>
+            <p:ph type="body" idx="3" sz="quarter"/>
+          </p:nvPr>
+        </p:nvSpPr>
+        <p:spPr/>
+        <p:txBody>
+          <a:bodyPr/>
+          <a:lstStyle/>
+          <a:p>
+            <a:r>
+              <a:t>RETO 5 · Equipaje de mano — ⚖️ onderhandeling &amp; dilemma</a:t>
+            </a:r>
+          </a:p>
+          <a:p>
+            <a:r>
+              <a:t>OPDRACHT: Beslis wat de rugzak in gaat. Elk voorwerp wordt verdedigd met para.</a:t>
+            </a:r>
+          </a:p>
+          <a:p>
+            <a:r>
+              <a:t>DE REGEL: Zeven kilo, geen gram meer. Elk voorwerp krijgt een «para»-zin die zegt waarvóór het dient — «para el frío de la noche», niet «porque es útil». Zonder «para» blijft het thuis.</a:t>
+            </a:r>
+          </a:p>
+          <a:p>
+            <a:r>
+              <a:t>VERLOOP: Mirad la lista y los pesos. | Cada uno defiende tres objetos con para. | Sumad. ¿Pasáis de siete kilos? | Negociad hasta llegar justo. | Y ahora: ¿qué habéis dejado y os va a hacer falta?</a:t>
+            </a:r>
+          </a:p>
+          <a:p>
+            <a:r>
+              <a:t>SLEUTEL: De volledige lijst weegt ongeveer 7,2 kilo: net te veel. Er móet dus geschrapt worden, en dat is opzet.  ||  De bestemming beslist: van Atacama naar Patagonië betekent 35 graden én nul graden. Wie de muts schrapt, heeft de opdracht niet gelezen; wie het boek houdt boven de regenjas, moet dat kunnen verdedigen.  ||  «¿Y para qué lo quieres exactamente?» is de vraag die de hele reto draagt: hij dwingt de ander tot een tweede, preciezere para-zin.  ||  Toets de para-zinnen en het eindgewicht. Welke voorwerpen meegaan, is aan de groep.</a:t>
+            </a:r>
+          </a:p>
+          <a:p>
+            <a:r>
+              <a:t>NOTA: Weeg het echt na als je een weegschaal hebt en de klas eigen spullen meebrengt. Het verschil tussen geschat en gewogen gewicht is altijd een verrassing.</a:t>
+            </a:r>
+          </a:p>
+        </p:txBody>
+      </p:sp>
+    </p:spTree>
+  </p:cSld>
+  <p:clrMapOvr>
+    <a:masterClrMapping/>
+  </p:clrMapOvr>
+</p:notes>
 </file>
 
 <file path=ppt/slideLayouts/slideLayout1.xml><?xml version="1.0" encoding="utf-8"?>
@@ -31537,6 +31789,4371 @@
 </p:sld>
 </file>
 
+<file path=ppt/slides/slide21.xml><?xml version="1.0" encoding="utf-8"?>
+<p:sld xmlns:a="http://schemas.openxmlformats.org/drawingml/2006/main" xmlns:p="http://schemas.openxmlformats.org/presentationml/2006/main" xmlns:r="http://schemas.openxmlformats.org/officeDocument/2006/relationships">
+  <p:cSld>
+    <p:spTree>
+      <p:nvGrpSpPr>
+        <p:cNvPr id="1" name=""/>
+        <p:cNvGrpSpPr/>
+        <p:nvPr/>
+      </p:nvGrpSpPr>
+      <p:grpSpPr/>
+      <p:sp>
+        <p:nvSpPr>
+          <p:cNvPr id="2" name="Fondo"/>
+          <p:cNvSpPr/>
+          <p:nvPr/>
+        </p:nvSpPr>
+        <p:spPr>
+          <a:xfrm>
+            <a:off x="0" y="0"/>
+            <a:ext cx="12191695" cy="6858000"/>
+          </a:xfrm>
+          <a:prstGeom prst="rect">
+            <a:avLst/>
+          </a:prstGeom>
+          <a:solidFill>
+            <a:srgbClr val="FCFBF8"/>
+          </a:solidFill>
+          <a:ln>
+            <a:noFill/>
+          </a:ln>
+          <a:effectLst/>
+        </p:spPr>
+        <p:style>
+          <a:lnRef idx="1">
+            <a:schemeClr val="accent1"/>
+          </a:lnRef>
+          <a:fillRef idx="3">
+            <a:schemeClr val="accent1"/>
+          </a:fillRef>
+          <a:effectRef idx="2">
+            <a:schemeClr val="accent1"/>
+          </a:effectRef>
+          <a:fontRef idx="minor">
+            <a:schemeClr val="lt1"/>
+          </a:fontRef>
+        </p:style>
+        <p:txBody>
+          <a:bodyPr rtlCol="0" anchor="ctr"/>
+          <a:lstStyle/>
+          <a:p/>
+        </p:txBody>
+      </p:sp>
+      <p:sp>
+        <p:nvSpPr>
+          <p:cNvPr id="3" name="Cabecera"/>
+          <p:cNvSpPr/>
+          <p:nvPr/>
+        </p:nvSpPr>
+        <p:spPr>
+          <a:xfrm>
+            <a:off x="0" y="0"/>
+            <a:ext cx="12191695" cy="1078992"/>
+          </a:xfrm>
+          <a:prstGeom prst="rect">
+            <a:avLst/>
+          </a:prstGeom>
+          <a:solidFill>
+            <a:srgbClr val="7C56A9"/>
+          </a:solidFill>
+          <a:ln>
+            <a:noFill/>
+          </a:ln>
+          <a:effectLst/>
+        </p:spPr>
+        <p:style>
+          <a:lnRef idx="1">
+            <a:schemeClr val="accent1"/>
+          </a:lnRef>
+          <a:fillRef idx="3">
+            <a:schemeClr val="accent1"/>
+          </a:fillRef>
+          <a:effectRef idx="2">
+            <a:schemeClr val="accent1"/>
+          </a:effectRef>
+          <a:fontRef idx="minor">
+            <a:schemeClr val="lt1"/>
+          </a:fontRef>
+        </p:style>
+        <p:txBody>
+          <a:bodyPr rtlCol="0" anchor="ctr"/>
+          <a:lstStyle/>
+          <a:p/>
+        </p:txBody>
+      </p:sp>
+      <p:sp>
+        <p:nvSpPr>
+          <p:cNvPr id="4" name="Chip"/>
+          <p:cNvSpPr/>
+          <p:nvPr/>
+        </p:nvSpPr>
+        <p:spPr>
+          <a:xfrm>
+            <a:off x="457200" y="182880"/>
+            <a:ext cx="3017520" cy="292608"/>
+          </a:xfrm>
+          <a:prstGeom prst="roundRect">
+            <a:avLst>
+              <a:gd name="adj" fmla="val 50000"/>
+            </a:avLst>
+          </a:prstGeom>
+          <a:solidFill>
+            <a:srgbClr val="FFFFFF"/>
+          </a:solidFill>
+          <a:ln>
+            <a:noFill/>
+          </a:ln>
+          <a:effectLst/>
+        </p:spPr>
+        <p:style>
+          <a:lnRef idx="1">
+            <a:schemeClr val="accent1"/>
+          </a:lnRef>
+          <a:fillRef idx="3">
+            <a:schemeClr val="accent1"/>
+          </a:fillRef>
+          <a:effectRef idx="2">
+            <a:schemeClr val="accent1"/>
+          </a:effectRef>
+          <a:fontRef idx="minor">
+            <a:schemeClr val="lt1"/>
+          </a:fontRef>
+        </p:style>
+        <p:txBody>
+          <a:bodyPr rtlCol="0" anchor="ctr"/>
+          <a:lstStyle/>
+          <a:p/>
+        </p:txBody>
+      </p:sp>
+      <p:sp>
+        <p:nvSpPr>
+          <p:cNvPr id="5" name="ChipTxt"/>
+          <p:cNvSpPr txBox="1"/>
+          <p:nvPr/>
+        </p:nvSpPr>
+        <p:spPr>
+          <a:xfrm>
+            <a:off x="457200" y="173736"/>
+            <a:ext cx="3017520" cy="310896"/>
+          </a:xfrm>
+          <a:prstGeom prst="rect">
+            <a:avLst/>
+          </a:prstGeom>
+          <a:noFill/>
+        </p:spPr>
+        <p:txBody>
+          <a:bodyPr wrap="square" anchor="ctr" lIns="45720" rIns="45720" tIns="27432" bIns="27432">
+            <a:normAutofit/>
+          </a:bodyPr>
+          <a:lstStyle/>
+          <a:p>
+            <a:pPr algn="ctr"/>
+            <a:r>
+              <a:rPr sz="950" b="1">
+                <a:solidFill>
+                  <a:srgbClr val="5B3E83"/>
+                </a:solidFill>
+                <a:latin typeface="Inter"/>
+              </a:rPr>
+              <a:t>RETO 1 · ONDERHANDELING &amp; DILEMMA</a:t>
+            </a:r>
+          </a:p>
+        </p:txBody>
+      </p:sp>
+      <p:sp>
+        <p:nvSpPr>
+          <p:cNvPr id="6" name="Titulo"/>
+          <p:cNvSpPr txBox="1"/>
+          <p:nvPr/>
+        </p:nvSpPr>
+        <p:spPr>
+          <a:xfrm>
+            <a:off x="457200" y="502920"/>
+            <a:ext cx="8412480" cy="475488"/>
+          </a:xfrm>
+          <a:prstGeom prst="rect">
+            <a:avLst/>
+          </a:prstGeom>
+          <a:noFill/>
+        </p:spPr>
+        <p:txBody>
+          <a:bodyPr wrap="square" anchor="t" lIns="45720" rIns="45720" tIns="27432" bIns="27432">
+            <a:normAutofit/>
+          </a:bodyPr>
+          <a:lstStyle/>
+          <a:p>
+            <a:pPr algn="l"/>
+            <a:r>
+              <a:rPr sz="2700" b="1">
+                <a:solidFill>
+                  <a:srgbClr val="FFFFFF"/>
+                </a:solidFill>
+                <a:latin typeface="Bricolage Grotesque"/>
+              </a:rPr>
+              <a:t>El vuelo cancelado</a:t>
+            </a:r>
+          </a:p>
+        </p:txBody>
+      </p:sp>
+      <p:sp>
+        <p:nvSpPr>
+          <p:cNvPr id="7" name="Badges"/>
+          <p:cNvSpPr txBox="1"/>
+          <p:nvPr/>
+        </p:nvSpPr>
+        <p:spPr>
+          <a:xfrm>
+            <a:off x="9052560" y="256032"/>
+            <a:ext cx="2651760" cy="640080"/>
+          </a:xfrm>
+          <a:prstGeom prst="rect">
+            <a:avLst/>
+          </a:prstGeom>
+          <a:noFill/>
+        </p:spPr>
+        <p:txBody>
+          <a:bodyPr wrap="square" anchor="t" lIns="45720" rIns="45720" tIns="27432" bIns="27432">
+            <a:normAutofit/>
+          </a:bodyPr>
+          <a:lstStyle/>
+          <a:p>
+            <a:pPr algn="r"/>
+            <a:r>
+              <a:rPr sz="1000">
+                <a:solidFill>
+                  <a:srgbClr val="EEE8F5"/>
+                </a:solidFill>
+                <a:latin typeface="Inter"/>
+              </a:rPr>
+              <a:t>👥 En parejas</a:t>
+            </a:r>
+          </a:p>
+          <a:p>
+            <a:pPr algn="r"/>
+            <a:r>
+              <a:rPr sz="1000">
+                <a:solidFill>
+                  <a:srgbClr val="EEE8F5"/>
+                </a:solidFill>
+                <a:latin typeface="Inter"/>
+              </a:rPr>
+              <a:t>± 18 min · ★★★</a:t>
+            </a:r>
+          </a:p>
+        </p:txBody>
+      </p:sp>
+      <p:sp>
+        <p:nvSpPr>
+          <p:cNvPr id="8" name="Gancho"/>
+          <p:cNvSpPr txBox="1"/>
+          <p:nvPr/>
+        </p:nvSpPr>
+        <p:spPr>
+          <a:xfrm>
+            <a:off x="457200" y="1225296"/>
+            <a:ext cx="11274552" cy="566928"/>
+          </a:xfrm>
+          <a:prstGeom prst="rect">
+            <a:avLst/>
+          </a:prstGeom>
+          <a:noFill/>
+        </p:spPr>
+        <p:txBody>
+          <a:bodyPr wrap="square" anchor="t" lIns="45720" rIns="45720" tIns="27432" bIns="27432">
+            <a:normAutofit/>
+          </a:bodyPr>
+          <a:lstStyle/>
+          <a:p>
+            <a:pPr algn="l"/>
+            <a:r>
+              <a:rPr sz="1600" b="1">
+                <a:solidFill>
+                  <a:srgbClr val="5B3E83"/>
+                </a:solidFill>
+                <a:latin typeface="Bricolage Grotesque"/>
+              </a:rPr>
+              <a:t>Tú tienes derechos. El mostrador tiene normas. Los dos tenéis razón.</a:t>
+            </a:r>
+          </a:p>
+          <a:p>
+            <a:pPr algn="l"/>
+            <a:r>
+              <a:rPr sz="1100" i="1">
+                <a:solidFill>
+                  <a:srgbClr val="6A6E78"/>
+                </a:solidFill>
+                <a:latin typeface="Inter"/>
+              </a:rPr>
+              <a:t>Jij hebt rechten. De balie heeft regels. Jullie hebben allebei gelijk.</a:t>
+            </a:r>
+          </a:p>
+        </p:txBody>
+      </p:sp>
+      <p:sp>
+        <p:nvSpPr>
+          <p:cNvPr id="9" name="ReglaCaja"/>
+          <p:cNvSpPr/>
+          <p:nvPr/>
+        </p:nvSpPr>
+        <p:spPr>
+          <a:xfrm>
+            <a:off x="457200" y="1847088"/>
+            <a:ext cx="11274552" cy="658368"/>
+          </a:xfrm>
+          <a:prstGeom prst="roundRect">
+            <a:avLst>
+              <a:gd name="adj" fmla="val 5000"/>
+            </a:avLst>
+          </a:prstGeom>
+          <a:solidFill>
+            <a:srgbClr val="FBF3D6"/>
+          </a:solidFill>
+          <a:ln>
+            <a:noFill/>
+          </a:ln>
+          <a:effectLst/>
+        </p:spPr>
+        <p:style>
+          <a:lnRef idx="1">
+            <a:schemeClr val="accent1"/>
+          </a:lnRef>
+          <a:fillRef idx="3">
+            <a:schemeClr val="accent1"/>
+          </a:fillRef>
+          <a:effectRef idx="2">
+            <a:schemeClr val="accent1"/>
+          </a:effectRef>
+          <a:fontRef idx="minor">
+            <a:schemeClr val="lt1"/>
+          </a:fontRef>
+        </p:style>
+        <p:txBody>
+          <a:bodyPr rtlCol="0" anchor="ctr"/>
+          <a:lstStyle/>
+          <a:p/>
+        </p:txBody>
+      </p:sp>
+      <p:sp>
+        <p:nvSpPr>
+          <p:cNvPr id="10" name="ReglaTxt"/>
+          <p:cNvSpPr txBox="1"/>
+          <p:nvPr/>
+        </p:nvSpPr>
+        <p:spPr>
+          <a:xfrm>
+            <a:off x="603504" y="1883664"/>
+            <a:ext cx="10972800" cy="585216"/>
+          </a:xfrm>
+          <a:prstGeom prst="rect">
+            <a:avLst/>
+          </a:prstGeom>
+          <a:noFill/>
+        </p:spPr>
+        <p:txBody>
+          <a:bodyPr wrap="square" anchor="t" lIns="45720" rIns="45720" tIns="27432" bIns="27432">
+            <a:normAutofit/>
+          </a:bodyPr>
+          <a:lstStyle/>
+          <a:p>
+            <a:pPr algn="l"/>
+            <a:r>
+              <a:rPr sz="850" b="1">
+                <a:solidFill>
+                  <a:srgbClr val="B7860B"/>
+                </a:solidFill>
+                <a:latin typeface="Inter"/>
+              </a:rPr>
+              <a:t>LA REGLA DEL RETO</a:t>
+            </a:r>
+          </a:p>
+          <a:p>
+            <a:pPr algn="l"/>
+            <a:r>
+              <a:rPr sz="1100">
+                <a:solidFill>
+                  <a:srgbClr val="20242E"/>
+                </a:solidFill>
+                <a:latin typeface="Inter"/>
+              </a:rPr>
+              <a:t>Je geheime instructie mag je niet voorlezen en niet vertalen — je moet ernaar hándelen. En niemand mag de stem verheffen: dit is een balie, geen ruzie.</a:t>
+            </a:r>
+          </a:p>
+        </p:txBody>
+      </p:sp>
+      <p:sp>
+        <p:nvSpPr>
+          <p:cNvPr id="11" name="Tarjeta 0"/>
+          <p:cNvSpPr/>
+          <p:nvPr/>
+        </p:nvSpPr>
+        <p:spPr>
+          <a:xfrm>
+            <a:off x="457200" y="2670048"/>
+            <a:ext cx="2708910" cy="898398"/>
+          </a:xfrm>
+          <a:prstGeom prst="roundRect">
+            <a:avLst>
+              <a:gd name="adj" fmla="val 6000"/>
+            </a:avLst>
+          </a:prstGeom>
+          <a:solidFill>
+            <a:srgbClr val="FFFFFF"/>
+          </a:solidFill>
+          <a:ln w="12700">
+            <a:solidFill>
+              <a:srgbClr val="E4E3DE"/>
+            </a:solidFill>
+          </a:ln>
+          <a:effectLst/>
+        </p:spPr>
+        <p:style>
+          <a:lnRef idx="1">
+            <a:schemeClr val="accent1"/>
+          </a:lnRef>
+          <a:fillRef idx="3">
+            <a:schemeClr val="accent1"/>
+          </a:fillRef>
+          <a:effectRef idx="2">
+            <a:schemeClr val="accent1"/>
+          </a:effectRef>
+          <a:fontRef idx="minor">
+            <a:schemeClr val="lt1"/>
+          </a:fontRef>
+        </p:style>
+        <p:txBody>
+          <a:bodyPr rtlCol="0" anchor="ctr"/>
+          <a:lstStyle/>
+          <a:p/>
+        </p:txBody>
+      </p:sp>
+      <p:sp>
+        <p:nvSpPr>
+          <p:cNvPr id="12" name="TarjetaTxt 0"/>
+          <p:cNvSpPr txBox="1"/>
+          <p:nvPr/>
+        </p:nvSpPr>
+        <p:spPr>
+          <a:xfrm>
+            <a:off x="548640" y="2724912"/>
+            <a:ext cx="2526030" cy="788670"/>
+          </a:xfrm>
+          <a:prstGeom prst="rect">
+            <a:avLst/>
+          </a:prstGeom>
+          <a:noFill/>
+        </p:spPr>
+        <p:txBody>
+          <a:bodyPr wrap="square" anchor="t" lIns="45720" rIns="45720" tIns="27432" bIns="27432">
+            <a:normAutofit/>
+          </a:bodyPr>
+          <a:lstStyle/>
+          <a:p>
+            <a:pPr algn="l"/>
+            <a:r>
+              <a:rPr sz="1100" b="1">
+                <a:solidFill>
+                  <a:srgbClr val="5B3E83"/>
+                </a:solidFill>
+                <a:latin typeface="Bricolage Grotesque"/>
+              </a:rPr>
+              <a:t>La situación</a:t>
+            </a:r>
+          </a:p>
+          <a:p>
+            <a:pPr algn="l"/>
+            <a:r>
+              <a:rPr sz="1000">
+                <a:solidFill>
+                  <a:srgbClr val="20242E"/>
+                </a:solidFill>
+                <a:latin typeface="Inter"/>
+              </a:rPr>
+              <a:t>Vuelo Santiago–Madrid, cancelado a las 22:40. El próximo es dentro de 26 horas.</a:t>
+            </a:r>
+          </a:p>
+        </p:txBody>
+      </p:sp>
+      <p:sp>
+        <p:nvSpPr>
+          <p:cNvPr id="13" name="Tarjeta 1"/>
+          <p:cNvSpPr/>
+          <p:nvPr/>
+        </p:nvSpPr>
+        <p:spPr>
+          <a:xfrm>
+            <a:off x="3312414" y="2670048"/>
+            <a:ext cx="2708910" cy="898398"/>
+          </a:xfrm>
+          <a:prstGeom prst="roundRect">
+            <a:avLst>
+              <a:gd name="adj" fmla="val 6000"/>
+            </a:avLst>
+          </a:prstGeom>
+          <a:solidFill>
+            <a:srgbClr val="FFFFFF"/>
+          </a:solidFill>
+          <a:ln w="12700">
+            <a:solidFill>
+              <a:srgbClr val="E4E3DE"/>
+            </a:solidFill>
+          </a:ln>
+          <a:effectLst/>
+        </p:spPr>
+        <p:style>
+          <a:lnRef idx="1">
+            <a:schemeClr val="accent1"/>
+          </a:lnRef>
+          <a:fillRef idx="3">
+            <a:schemeClr val="accent1"/>
+          </a:fillRef>
+          <a:effectRef idx="2">
+            <a:schemeClr val="accent1"/>
+          </a:effectRef>
+          <a:fontRef idx="minor">
+            <a:schemeClr val="lt1"/>
+          </a:fontRef>
+        </p:style>
+        <p:txBody>
+          <a:bodyPr rtlCol="0" anchor="ctr"/>
+          <a:lstStyle/>
+          <a:p/>
+        </p:txBody>
+      </p:sp>
+      <p:sp>
+        <p:nvSpPr>
+          <p:cNvPr id="14" name="TarjetaTxt 1"/>
+          <p:cNvSpPr txBox="1"/>
+          <p:nvPr/>
+        </p:nvSpPr>
+        <p:spPr>
+          <a:xfrm>
+            <a:off x="3403854" y="2724912"/>
+            <a:ext cx="2526030" cy="788670"/>
+          </a:xfrm>
+          <a:prstGeom prst="rect">
+            <a:avLst/>
+          </a:prstGeom>
+          <a:noFill/>
+        </p:spPr>
+        <p:txBody>
+          <a:bodyPr wrap="square" anchor="t" lIns="45720" rIns="45720" tIns="27432" bIns="27432">
+            <a:normAutofit/>
+          </a:bodyPr>
+          <a:lstStyle/>
+          <a:p>
+            <a:pPr algn="l"/>
+            <a:r>
+              <a:rPr sz="1100" b="1">
+                <a:solidFill>
+                  <a:srgbClr val="5B3E83"/>
+                </a:solidFill>
+                <a:latin typeface="Bricolage Grotesque"/>
+              </a:rPr>
+              <a:t>Pasajero · secreto</a:t>
+            </a:r>
+          </a:p>
+          <a:p>
+            <a:pPr algn="l"/>
+            <a:r>
+              <a:rPr sz="1000">
+                <a:solidFill>
+                  <a:srgbClr val="20242E"/>
+                </a:solidFill>
+                <a:latin typeface="Inter"/>
+              </a:rPr>
+              <a:t>Tienes un examen pasado mañana a las nueve de la mañana.</a:t>
+            </a:r>
+          </a:p>
+        </p:txBody>
+      </p:sp>
+      <p:sp>
+        <p:nvSpPr>
+          <p:cNvPr id="15" name="Tarjeta 2"/>
+          <p:cNvSpPr/>
+          <p:nvPr/>
+        </p:nvSpPr>
+        <p:spPr>
+          <a:xfrm>
+            <a:off x="6167628" y="2670048"/>
+            <a:ext cx="2708910" cy="898398"/>
+          </a:xfrm>
+          <a:prstGeom prst="roundRect">
+            <a:avLst>
+              <a:gd name="adj" fmla="val 6000"/>
+            </a:avLst>
+          </a:prstGeom>
+          <a:solidFill>
+            <a:srgbClr val="FFFFFF"/>
+          </a:solidFill>
+          <a:ln w="12700">
+            <a:solidFill>
+              <a:srgbClr val="E4E3DE"/>
+            </a:solidFill>
+          </a:ln>
+          <a:effectLst/>
+        </p:spPr>
+        <p:style>
+          <a:lnRef idx="1">
+            <a:schemeClr val="accent1"/>
+          </a:lnRef>
+          <a:fillRef idx="3">
+            <a:schemeClr val="accent1"/>
+          </a:fillRef>
+          <a:effectRef idx="2">
+            <a:schemeClr val="accent1"/>
+          </a:effectRef>
+          <a:fontRef idx="minor">
+            <a:schemeClr val="lt1"/>
+          </a:fontRef>
+        </p:style>
+        <p:txBody>
+          <a:bodyPr rtlCol="0" anchor="ctr"/>
+          <a:lstStyle/>
+          <a:p/>
+        </p:txBody>
+      </p:sp>
+      <p:sp>
+        <p:nvSpPr>
+          <p:cNvPr id="16" name="TarjetaTxt 2"/>
+          <p:cNvSpPr txBox="1"/>
+          <p:nvPr/>
+        </p:nvSpPr>
+        <p:spPr>
+          <a:xfrm>
+            <a:off x="6259068" y="2724912"/>
+            <a:ext cx="2526030" cy="788670"/>
+          </a:xfrm>
+          <a:prstGeom prst="rect">
+            <a:avLst/>
+          </a:prstGeom>
+          <a:noFill/>
+        </p:spPr>
+        <p:txBody>
+          <a:bodyPr wrap="square" anchor="t" lIns="45720" rIns="45720" tIns="27432" bIns="27432">
+            <a:normAutofit/>
+          </a:bodyPr>
+          <a:lstStyle/>
+          <a:p>
+            <a:pPr algn="l"/>
+            <a:r>
+              <a:rPr sz="1100" b="1">
+                <a:solidFill>
+                  <a:srgbClr val="5B3E83"/>
+                </a:solidFill>
+                <a:latin typeface="Bricolage Grotesque"/>
+              </a:rPr>
+              <a:t>Pasajero · secreto</a:t>
+            </a:r>
+          </a:p>
+          <a:p>
+            <a:pPr algn="l"/>
+            <a:r>
+              <a:rPr sz="1000">
+                <a:solidFill>
+                  <a:srgbClr val="20242E"/>
+                </a:solidFill>
+                <a:latin typeface="Inter"/>
+              </a:rPr>
+              <a:t>No te puedes permitir un hotel de tu bolsillo.</a:t>
+            </a:r>
+          </a:p>
+        </p:txBody>
+      </p:sp>
+      <p:sp>
+        <p:nvSpPr>
+          <p:cNvPr id="17" name="Tarjeta 3"/>
+          <p:cNvSpPr/>
+          <p:nvPr/>
+        </p:nvSpPr>
+        <p:spPr>
+          <a:xfrm>
+            <a:off x="9022842" y="2670048"/>
+            <a:ext cx="2708910" cy="898398"/>
+          </a:xfrm>
+          <a:prstGeom prst="roundRect">
+            <a:avLst>
+              <a:gd name="adj" fmla="val 6000"/>
+            </a:avLst>
+          </a:prstGeom>
+          <a:solidFill>
+            <a:srgbClr val="FFFFFF"/>
+          </a:solidFill>
+          <a:ln w="12700">
+            <a:solidFill>
+              <a:srgbClr val="E4E3DE"/>
+            </a:solidFill>
+          </a:ln>
+          <a:effectLst/>
+        </p:spPr>
+        <p:style>
+          <a:lnRef idx="1">
+            <a:schemeClr val="accent1"/>
+          </a:lnRef>
+          <a:fillRef idx="3">
+            <a:schemeClr val="accent1"/>
+          </a:fillRef>
+          <a:effectRef idx="2">
+            <a:schemeClr val="accent1"/>
+          </a:effectRef>
+          <a:fontRef idx="minor">
+            <a:schemeClr val="lt1"/>
+          </a:fontRef>
+        </p:style>
+        <p:txBody>
+          <a:bodyPr rtlCol="0" anchor="ctr"/>
+          <a:lstStyle/>
+          <a:p/>
+        </p:txBody>
+      </p:sp>
+      <p:sp>
+        <p:nvSpPr>
+          <p:cNvPr id="18" name="TarjetaTxt 3"/>
+          <p:cNvSpPr txBox="1"/>
+          <p:nvPr/>
+        </p:nvSpPr>
+        <p:spPr>
+          <a:xfrm>
+            <a:off x="9114282" y="2724912"/>
+            <a:ext cx="2526030" cy="788670"/>
+          </a:xfrm>
+          <a:prstGeom prst="rect">
+            <a:avLst/>
+          </a:prstGeom>
+          <a:noFill/>
+        </p:spPr>
+        <p:txBody>
+          <a:bodyPr wrap="square" anchor="t" lIns="45720" rIns="45720" tIns="27432" bIns="27432">
+            <a:normAutofit/>
+          </a:bodyPr>
+          <a:lstStyle/>
+          <a:p>
+            <a:pPr algn="l"/>
+            <a:r>
+              <a:rPr sz="1100" b="1">
+                <a:solidFill>
+                  <a:srgbClr val="5B3E83"/>
+                </a:solidFill>
+                <a:latin typeface="Bricolage Grotesque"/>
+              </a:rPr>
+              <a:t>Pasajero · secreto</a:t>
+            </a:r>
+          </a:p>
+          <a:p>
+            <a:pPr algn="l"/>
+            <a:r>
+              <a:rPr sz="1000">
+                <a:solidFill>
+                  <a:srgbClr val="20242E"/>
+                </a:solidFill>
+                <a:latin typeface="Inter"/>
+              </a:rPr>
+              <a:t>Sabes que tienes derecho a comida y alojamiento, pero no sabes decirlo con esas palabras.</a:t>
+            </a:r>
+          </a:p>
+        </p:txBody>
+      </p:sp>
+      <p:sp>
+        <p:nvSpPr>
+          <p:cNvPr id="19" name="Tarjeta 4"/>
+          <p:cNvSpPr/>
+          <p:nvPr/>
+        </p:nvSpPr>
+        <p:spPr>
+          <a:xfrm>
+            <a:off x="457200" y="3696462"/>
+            <a:ext cx="2708910" cy="898398"/>
+          </a:xfrm>
+          <a:prstGeom prst="roundRect">
+            <a:avLst>
+              <a:gd name="adj" fmla="val 6000"/>
+            </a:avLst>
+          </a:prstGeom>
+          <a:solidFill>
+            <a:srgbClr val="FFFFFF"/>
+          </a:solidFill>
+          <a:ln w="12700">
+            <a:solidFill>
+              <a:srgbClr val="E4E3DE"/>
+            </a:solidFill>
+          </a:ln>
+          <a:effectLst/>
+        </p:spPr>
+        <p:style>
+          <a:lnRef idx="1">
+            <a:schemeClr val="accent1"/>
+          </a:lnRef>
+          <a:fillRef idx="3">
+            <a:schemeClr val="accent1"/>
+          </a:fillRef>
+          <a:effectRef idx="2">
+            <a:schemeClr val="accent1"/>
+          </a:effectRef>
+          <a:fontRef idx="minor">
+            <a:schemeClr val="lt1"/>
+          </a:fontRef>
+        </p:style>
+        <p:txBody>
+          <a:bodyPr rtlCol="0" anchor="ctr"/>
+          <a:lstStyle/>
+          <a:p/>
+        </p:txBody>
+      </p:sp>
+      <p:sp>
+        <p:nvSpPr>
+          <p:cNvPr id="20" name="TarjetaTxt 4"/>
+          <p:cNvSpPr txBox="1"/>
+          <p:nvPr/>
+        </p:nvSpPr>
+        <p:spPr>
+          <a:xfrm>
+            <a:off x="548640" y="3751326"/>
+            <a:ext cx="2526030" cy="788670"/>
+          </a:xfrm>
+          <a:prstGeom prst="rect">
+            <a:avLst/>
+          </a:prstGeom>
+          <a:noFill/>
+        </p:spPr>
+        <p:txBody>
+          <a:bodyPr wrap="square" anchor="t" lIns="45720" rIns="45720" tIns="27432" bIns="27432">
+            <a:normAutofit/>
+          </a:bodyPr>
+          <a:lstStyle/>
+          <a:p>
+            <a:pPr algn="l"/>
+            <a:r>
+              <a:rPr sz="1100" b="1">
+                <a:solidFill>
+                  <a:srgbClr val="5B3E83"/>
+                </a:solidFill>
+                <a:latin typeface="Bricolage Grotesque"/>
+              </a:rPr>
+              <a:t>Mostrador · secreto</a:t>
+            </a:r>
+          </a:p>
+          <a:p>
+            <a:pPr algn="l"/>
+            <a:r>
+              <a:rPr sz="1000">
+                <a:solidFill>
+                  <a:srgbClr val="20242E"/>
+                </a:solidFill>
+                <a:latin typeface="Inter"/>
+              </a:rPr>
+              <a:t>Solo puedes dar un vale de comida de 12 €, salvo que el pasajero lo pida claramente.</a:t>
+            </a:r>
+          </a:p>
+        </p:txBody>
+      </p:sp>
+      <p:sp>
+        <p:nvSpPr>
+          <p:cNvPr id="21" name="Tarjeta 5"/>
+          <p:cNvSpPr/>
+          <p:nvPr/>
+        </p:nvSpPr>
+        <p:spPr>
+          <a:xfrm>
+            <a:off x="3312414" y="3696462"/>
+            <a:ext cx="2708910" cy="898398"/>
+          </a:xfrm>
+          <a:prstGeom prst="roundRect">
+            <a:avLst>
+              <a:gd name="adj" fmla="val 6000"/>
+            </a:avLst>
+          </a:prstGeom>
+          <a:solidFill>
+            <a:srgbClr val="FFFFFF"/>
+          </a:solidFill>
+          <a:ln w="12700">
+            <a:solidFill>
+              <a:srgbClr val="E4E3DE"/>
+            </a:solidFill>
+          </a:ln>
+          <a:effectLst/>
+        </p:spPr>
+        <p:style>
+          <a:lnRef idx="1">
+            <a:schemeClr val="accent1"/>
+          </a:lnRef>
+          <a:fillRef idx="3">
+            <a:schemeClr val="accent1"/>
+          </a:fillRef>
+          <a:effectRef idx="2">
+            <a:schemeClr val="accent1"/>
+          </a:effectRef>
+          <a:fontRef idx="minor">
+            <a:schemeClr val="lt1"/>
+          </a:fontRef>
+        </p:style>
+        <p:txBody>
+          <a:bodyPr rtlCol="0" anchor="ctr"/>
+          <a:lstStyle/>
+          <a:p/>
+        </p:txBody>
+      </p:sp>
+      <p:sp>
+        <p:nvSpPr>
+          <p:cNvPr id="22" name="TarjetaTxt 5"/>
+          <p:cNvSpPr txBox="1"/>
+          <p:nvPr/>
+        </p:nvSpPr>
+        <p:spPr>
+          <a:xfrm>
+            <a:off x="3403854" y="3751326"/>
+            <a:ext cx="2526030" cy="788670"/>
+          </a:xfrm>
+          <a:prstGeom prst="rect">
+            <a:avLst/>
+          </a:prstGeom>
+          <a:noFill/>
+        </p:spPr>
+        <p:txBody>
+          <a:bodyPr wrap="square" anchor="t" lIns="45720" rIns="45720" tIns="27432" bIns="27432">
+            <a:normAutofit/>
+          </a:bodyPr>
+          <a:lstStyle/>
+          <a:p>
+            <a:pPr algn="l"/>
+            <a:r>
+              <a:rPr sz="1100" b="1">
+                <a:solidFill>
+                  <a:srgbClr val="5B3E83"/>
+                </a:solidFill>
+                <a:latin typeface="Bricolage Grotesque"/>
+              </a:rPr>
+              <a:t>Mostrador · secreto</a:t>
+            </a:r>
+          </a:p>
+          <a:p>
+            <a:pPr algn="l"/>
+            <a:r>
+              <a:rPr sz="1000">
+                <a:solidFill>
+                  <a:srgbClr val="20242E"/>
+                </a:solidFill>
+                <a:latin typeface="Inter"/>
+              </a:rPr>
+              <a:t>Tienes dos plazas en un vuelo de otra compañía, pero son para casos urgentes.</a:t>
+            </a:r>
+          </a:p>
+        </p:txBody>
+      </p:sp>
+      <p:sp>
+        <p:nvSpPr>
+          <p:cNvPr id="23" name="Tarjeta 6"/>
+          <p:cNvSpPr/>
+          <p:nvPr/>
+        </p:nvSpPr>
+        <p:spPr>
+          <a:xfrm>
+            <a:off x="6167628" y="3696462"/>
+            <a:ext cx="2708910" cy="898398"/>
+          </a:xfrm>
+          <a:prstGeom prst="roundRect">
+            <a:avLst>
+              <a:gd name="adj" fmla="val 6000"/>
+            </a:avLst>
+          </a:prstGeom>
+          <a:solidFill>
+            <a:srgbClr val="FFFFFF"/>
+          </a:solidFill>
+          <a:ln w="12700">
+            <a:solidFill>
+              <a:srgbClr val="E4E3DE"/>
+            </a:solidFill>
+          </a:ln>
+          <a:effectLst/>
+        </p:spPr>
+        <p:style>
+          <a:lnRef idx="1">
+            <a:schemeClr val="accent1"/>
+          </a:lnRef>
+          <a:fillRef idx="3">
+            <a:schemeClr val="accent1"/>
+          </a:fillRef>
+          <a:effectRef idx="2">
+            <a:schemeClr val="accent1"/>
+          </a:effectRef>
+          <a:fontRef idx="minor">
+            <a:schemeClr val="lt1"/>
+          </a:fontRef>
+        </p:style>
+        <p:txBody>
+          <a:bodyPr rtlCol="0" anchor="ctr"/>
+          <a:lstStyle/>
+          <a:p/>
+        </p:txBody>
+      </p:sp>
+      <p:sp>
+        <p:nvSpPr>
+          <p:cNvPr id="24" name="TarjetaTxt 6"/>
+          <p:cNvSpPr txBox="1"/>
+          <p:nvPr/>
+        </p:nvSpPr>
+        <p:spPr>
+          <a:xfrm>
+            <a:off x="6259068" y="3751326"/>
+            <a:ext cx="2526030" cy="788670"/>
+          </a:xfrm>
+          <a:prstGeom prst="rect">
+            <a:avLst/>
+          </a:prstGeom>
+          <a:noFill/>
+        </p:spPr>
+        <p:txBody>
+          <a:bodyPr wrap="square" anchor="t" lIns="45720" rIns="45720" tIns="27432" bIns="27432">
+            <a:normAutofit/>
+          </a:bodyPr>
+          <a:lstStyle/>
+          <a:p>
+            <a:pPr algn="l"/>
+            <a:r>
+              <a:rPr sz="1100" b="1">
+                <a:solidFill>
+                  <a:srgbClr val="5B3E83"/>
+                </a:solidFill>
+                <a:latin typeface="Bricolage Grotesque"/>
+              </a:rPr>
+              <a:t>Mostrador · secreto</a:t>
+            </a:r>
+          </a:p>
+          <a:p>
+            <a:pPr algn="l"/>
+            <a:r>
+              <a:rPr sz="1000">
+                <a:solidFill>
+                  <a:srgbClr val="20242E"/>
+                </a:solidFill>
+                <a:latin typeface="Inter"/>
+              </a:rPr>
+              <a:t>Llevas nueve horas de turno y eres la única persona en el mostrador.</a:t>
+            </a:r>
+          </a:p>
+        </p:txBody>
+      </p:sp>
+      <p:sp>
+        <p:nvSpPr>
+          <p:cNvPr id="25" name="Tarjeta 7"/>
+          <p:cNvSpPr/>
+          <p:nvPr/>
+        </p:nvSpPr>
+        <p:spPr>
+          <a:xfrm>
+            <a:off x="9022842" y="3696462"/>
+            <a:ext cx="2708910" cy="898398"/>
+          </a:xfrm>
+          <a:prstGeom prst="roundRect">
+            <a:avLst>
+              <a:gd name="adj" fmla="val 6000"/>
+            </a:avLst>
+          </a:prstGeom>
+          <a:solidFill>
+            <a:srgbClr val="FFFFFF"/>
+          </a:solidFill>
+          <a:ln w="12700">
+            <a:solidFill>
+              <a:srgbClr val="E4E3DE"/>
+            </a:solidFill>
+          </a:ln>
+          <a:effectLst/>
+        </p:spPr>
+        <p:style>
+          <a:lnRef idx="1">
+            <a:schemeClr val="accent1"/>
+          </a:lnRef>
+          <a:fillRef idx="3">
+            <a:schemeClr val="accent1"/>
+          </a:fillRef>
+          <a:effectRef idx="2">
+            <a:schemeClr val="accent1"/>
+          </a:effectRef>
+          <a:fontRef idx="minor">
+            <a:schemeClr val="lt1"/>
+          </a:fontRef>
+        </p:style>
+        <p:txBody>
+          <a:bodyPr rtlCol="0" anchor="ctr"/>
+          <a:lstStyle/>
+          <a:p/>
+        </p:txBody>
+      </p:sp>
+      <p:sp>
+        <p:nvSpPr>
+          <p:cNvPr id="26" name="TarjetaTxt 7"/>
+          <p:cNvSpPr txBox="1"/>
+          <p:nvPr/>
+        </p:nvSpPr>
+        <p:spPr>
+          <a:xfrm>
+            <a:off x="9114282" y="3751326"/>
+            <a:ext cx="2526030" cy="788670"/>
+          </a:xfrm>
+          <a:prstGeom prst="rect">
+            <a:avLst/>
+          </a:prstGeom>
+          <a:noFill/>
+        </p:spPr>
+        <p:txBody>
+          <a:bodyPr wrap="square" anchor="t" lIns="45720" rIns="45720" tIns="27432" bIns="27432">
+            <a:normAutofit/>
+          </a:bodyPr>
+          <a:lstStyle/>
+          <a:p>
+            <a:pPr algn="l"/>
+            <a:r>
+              <a:rPr sz="1100" b="1">
+                <a:solidFill>
+                  <a:srgbClr val="5B3E83"/>
+                </a:solidFill>
+                <a:latin typeface="Bricolage Grotesque"/>
+              </a:rPr>
+              <a:t>marco · pasajero</a:t>
+            </a:r>
+          </a:p>
+          <a:p>
+            <a:pPr algn="l"/>
+            <a:r>
+              <a:rPr sz="1000">
+                <a:solidFill>
+                  <a:srgbClr val="20242E"/>
+                </a:solidFill>
+                <a:latin typeface="Inter"/>
+              </a:rPr>
+              <a:t>Entiendo que no es culpa suya, pero …</a:t>
+            </a:r>
+          </a:p>
+        </p:txBody>
+      </p:sp>
+      <p:sp>
+        <p:nvSpPr>
+          <p:cNvPr id="27" name="Tarjeta 8"/>
+          <p:cNvSpPr/>
+          <p:nvPr/>
+        </p:nvSpPr>
+        <p:spPr>
+          <a:xfrm>
+            <a:off x="457200" y="4722876"/>
+            <a:ext cx="2708910" cy="898398"/>
+          </a:xfrm>
+          <a:prstGeom prst="roundRect">
+            <a:avLst>
+              <a:gd name="adj" fmla="val 6000"/>
+            </a:avLst>
+          </a:prstGeom>
+          <a:solidFill>
+            <a:srgbClr val="FFFFFF"/>
+          </a:solidFill>
+          <a:ln w="12700">
+            <a:solidFill>
+              <a:srgbClr val="E4E3DE"/>
+            </a:solidFill>
+          </a:ln>
+          <a:effectLst/>
+        </p:spPr>
+        <p:style>
+          <a:lnRef idx="1">
+            <a:schemeClr val="accent1"/>
+          </a:lnRef>
+          <a:fillRef idx="3">
+            <a:schemeClr val="accent1"/>
+          </a:fillRef>
+          <a:effectRef idx="2">
+            <a:schemeClr val="accent1"/>
+          </a:effectRef>
+          <a:fontRef idx="minor">
+            <a:schemeClr val="lt1"/>
+          </a:fontRef>
+        </p:style>
+        <p:txBody>
+          <a:bodyPr rtlCol="0" anchor="ctr"/>
+          <a:lstStyle/>
+          <a:p/>
+        </p:txBody>
+      </p:sp>
+      <p:sp>
+        <p:nvSpPr>
+          <p:cNvPr id="28" name="TarjetaTxt 8"/>
+          <p:cNvSpPr txBox="1"/>
+          <p:nvPr/>
+        </p:nvSpPr>
+        <p:spPr>
+          <a:xfrm>
+            <a:off x="548640" y="4777740"/>
+            <a:ext cx="2526030" cy="788670"/>
+          </a:xfrm>
+          <a:prstGeom prst="rect">
+            <a:avLst/>
+          </a:prstGeom>
+          <a:noFill/>
+        </p:spPr>
+        <p:txBody>
+          <a:bodyPr wrap="square" anchor="t" lIns="45720" rIns="45720" tIns="27432" bIns="27432">
+            <a:normAutofit/>
+          </a:bodyPr>
+          <a:lstStyle/>
+          <a:p>
+            <a:pPr algn="l"/>
+            <a:r>
+              <a:rPr sz="1100" b="1">
+                <a:solidFill>
+                  <a:srgbClr val="5B3E83"/>
+                </a:solidFill>
+                <a:latin typeface="Bricolage Grotesque"/>
+              </a:rPr>
+              <a:t>marco · pasajero</a:t>
+            </a:r>
+          </a:p>
+          <a:p>
+            <a:pPr algn="l"/>
+            <a:r>
+              <a:rPr sz="1000">
+                <a:solidFill>
+                  <a:srgbClr val="20242E"/>
+                </a:solidFill>
+                <a:latin typeface="Inter"/>
+              </a:rPr>
+              <a:t>Tengo que estar en … el … a las …</a:t>
+            </a:r>
+          </a:p>
+        </p:txBody>
+      </p:sp>
+      <p:sp>
+        <p:nvSpPr>
+          <p:cNvPr id="29" name="Tarjeta 9"/>
+          <p:cNvSpPr/>
+          <p:nvPr/>
+        </p:nvSpPr>
+        <p:spPr>
+          <a:xfrm>
+            <a:off x="3312414" y="4722876"/>
+            <a:ext cx="2708910" cy="898398"/>
+          </a:xfrm>
+          <a:prstGeom prst="roundRect">
+            <a:avLst>
+              <a:gd name="adj" fmla="val 6000"/>
+            </a:avLst>
+          </a:prstGeom>
+          <a:solidFill>
+            <a:srgbClr val="FFFFFF"/>
+          </a:solidFill>
+          <a:ln w="12700">
+            <a:solidFill>
+              <a:srgbClr val="E4E3DE"/>
+            </a:solidFill>
+          </a:ln>
+          <a:effectLst/>
+        </p:spPr>
+        <p:style>
+          <a:lnRef idx="1">
+            <a:schemeClr val="accent1"/>
+          </a:lnRef>
+          <a:fillRef idx="3">
+            <a:schemeClr val="accent1"/>
+          </a:fillRef>
+          <a:effectRef idx="2">
+            <a:schemeClr val="accent1"/>
+          </a:effectRef>
+          <a:fontRef idx="minor">
+            <a:schemeClr val="lt1"/>
+          </a:fontRef>
+        </p:style>
+        <p:txBody>
+          <a:bodyPr rtlCol="0" anchor="ctr"/>
+          <a:lstStyle/>
+          <a:p/>
+        </p:txBody>
+      </p:sp>
+      <p:sp>
+        <p:nvSpPr>
+          <p:cNvPr id="30" name="TarjetaTxt 9"/>
+          <p:cNvSpPr txBox="1"/>
+          <p:nvPr/>
+        </p:nvSpPr>
+        <p:spPr>
+          <a:xfrm>
+            <a:off x="3403854" y="4777740"/>
+            <a:ext cx="2526030" cy="788670"/>
+          </a:xfrm>
+          <a:prstGeom prst="rect">
+            <a:avLst/>
+          </a:prstGeom>
+          <a:noFill/>
+        </p:spPr>
+        <p:txBody>
+          <a:bodyPr wrap="square" anchor="t" lIns="45720" rIns="45720" tIns="27432" bIns="27432">
+            <a:normAutofit/>
+          </a:bodyPr>
+          <a:lstStyle/>
+          <a:p>
+            <a:pPr algn="l"/>
+            <a:r>
+              <a:rPr sz="1100" b="1">
+                <a:solidFill>
+                  <a:srgbClr val="5B3E83"/>
+                </a:solidFill>
+                <a:latin typeface="Bricolage Grotesque"/>
+              </a:rPr>
+              <a:t>marco · pasajero</a:t>
+            </a:r>
+          </a:p>
+          <a:p>
+            <a:pPr algn="l"/>
+            <a:r>
+              <a:rPr sz="1000">
+                <a:solidFill>
+                  <a:srgbClr val="20242E"/>
+                </a:solidFill>
+                <a:latin typeface="Inter"/>
+              </a:rPr>
+              <a:t>¿Qué opciones hay?</a:t>
+            </a:r>
+          </a:p>
+        </p:txBody>
+      </p:sp>
+      <p:sp>
+        <p:nvSpPr>
+          <p:cNvPr id="31" name="Tarjeta 10"/>
+          <p:cNvSpPr/>
+          <p:nvPr/>
+        </p:nvSpPr>
+        <p:spPr>
+          <a:xfrm>
+            <a:off x="6167628" y="4722876"/>
+            <a:ext cx="2708910" cy="898398"/>
+          </a:xfrm>
+          <a:prstGeom prst="roundRect">
+            <a:avLst>
+              <a:gd name="adj" fmla="val 6000"/>
+            </a:avLst>
+          </a:prstGeom>
+          <a:solidFill>
+            <a:srgbClr val="FFFFFF"/>
+          </a:solidFill>
+          <a:ln w="12700">
+            <a:solidFill>
+              <a:srgbClr val="E4E3DE"/>
+            </a:solidFill>
+          </a:ln>
+          <a:effectLst/>
+        </p:spPr>
+        <p:style>
+          <a:lnRef idx="1">
+            <a:schemeClr val="accent1"/>
+          </a:lnRef>
+          <a:fillRef idx="3">
+            <a:schemeClr val="accent1"/>
+          </a:fillRef>
+          <a:effectRef idx="2">
+            <a:schemeClr val="accent1"/>
+          </a:effectRef>
+          <a:fontRef idx="minor">
+            <a:schemeClr val="lt1"/>
+          </a:fontRef>
+        </p:style>
+        <p:txBody>
+          <a:bodyPr rtlCol="0" anchor="ctr"/>
+          <a:lstStyle/>
+          <a:p/>
+        </p:txBody>
+      </p:sp>
+      <p:sp>
+        <p:nvSpPr>
+          <p:cNvPr id="32" name="TarjetaTxt 10"/>
+          <p:cNvSpPr txBox="1"/>
+          <p:nvPr/>
+        </p:nvSpPr>
+        <p:spPr>
+          <a:xfrm>
+            <a:off x="6259068" y="4777740"/>
+            <a:ext cx="2526030" cy="788670"/>
+          </a:xfrm>
+          <a:prstGeom prst="rect">
+            <a:avLst/>
+          </a:prstGeom>
+          <a:noFill/>
+        </p:spPr>
+        <p:txBody>
+          <a:bodyPr wrap="square" anchor="t" lIns="45720" rIns="45720" tIns="27432" bIns="27432">
+            <a:normAutofit/>
+          </a:bodyPr>
+          <a:lstStyle/>
+          <a:p>
+            <a:pPr algn="l"/>
+            <a:r>
+              <a:rPr sz="1100" b="1">
+                <a:solidFill>
+                  <a:srgbClr val="5B3E83"/>
+                </a:solidFill>
+                <a:latin typeface="Bricolage Grotesque"/>
+              </a:rPr>
+              <a:t>marco · pasajero</a:t>
+            </a:r>
+          </a:p>
+          <a:p>
+            <a:pPr algn="l"/>
+            <a:r>
+              <a:rPr sz="1000">
+                <a:solidFill>
+                  <a:srgbClr val="20242E"/>
+                </a:solidFill>
+                <a:latin typeface="Inter"/>
+              </a:rPr>
+              <a:t>¿Y si me pone en otro vuelo?</a:t>
+            </a:r>
+          </a:p>
+        </p:txBody>
+      </p:sp>
+      <p:sp>
+        <p:nvSpPr>
+          <p:cNvPr id="33" name="Tarjeta 11"/>
+          <p:cNvSpPr/>
+          <p:nvPr/>
+        </p:nvSpPr>
+        <p:spPr>
+          <a:xfrm>
+            <a:off x="9022842" y="4722876"/>
+            <a:ext cx="2708910" cy="898398"/>
+          </a:xfrm>
+          <a:prstGeom prst="roundRect">
+            <a:avLst>
+              <a:gd name="adj" fmla="val 6000"/>
+            </a:avLst>
+          </a:prstGeom>
+          <a:solidFill>
+            <a:srgbClr val="FFFFFF"/>
+          </a:solidFill>
+          <a:ln w="12700">
+            <a:solidFill>
+              <a:srgbClr val="E4E3DE"/>
+            </a:solidFill>
+          </a:ln>
+          <a:effectLst/>
+        </p:spPr>
+        <p:style>
+          <a:lnRef idx="1">
+            <a:schemeClr val="accent1"/>
+          </a:lnRef>
+          <a:fillRef idx="3">
+            <a:schemeClr val="accent1"/>
+          </a:fillRef>
+          <a:effectRef idx="2">
+            <a:schemeClr val="accent1"/>
+          </a:effectRef>
+          <a:fontRef idx="minor">
+            <a:schemeClr val="lt1"/>
+          </a:fontRef>
+        </p:style>
+        <p:txBody>
+          <a:bodyPr rtlCol="0" anchor="ctr"/>
+          <a:lstStyle/>
+          <a:p/>
+        </p:txBody>
+      </p:sp>
+      <p:sp>
+        <p:nvSpPr>
+          <p:cNvPr id="34" name="TarjetaTxt 11"/>
+          <p:cNvSpPr txBox="1"/>
+          <p:nvPr/>
+        </p:nvSpPr>
+        <p:spPr>
+          <a:xfrm>
+            <a:off x="9114282" y="4777740"/>
+            <a:ext cx="2526030" cy="788670"/>
+          </a:xfrm>
+          <a:prstGeom prst="rect">
+            <a:avLst/>
+          </a:prstGeom>
+          <a:noFill/>
+        </p:spPr>
+        <p:txBody>
+          <a:bodyPr wrap="square" anchor="t" lIns="45720" rIns="45720" tIns="27432" bIns="27432">
+            <a:normAutofit/>
+          </a:bodyPr>
+          <a:lstStyle/>
+          <a:p>
+            <a:pPr algn="l"/>
+            <a:r>
+              <a:rPr sz="1100" b="1">
+                <a:solidFill>
+                  <a:srgbClr val="5B3E83"/>
+                </a:solidFill>
+                <a:latin typeface="Bricolage Grotesque"/>
+              </a:rPr>
+              <a:t>marco · mostrador</a:t>
+            </a:r>
+          </a:p>
+          <a:p>
+            <a:pPr algn="l"/>
+            <a:r>
+              <a:rPr sz="1000">
+                <a:solidFill>
+                  <a:srgbClr val="20242E"/>
+                </a:solidFill>
+                <a:latin typeface="Inter"/>
+              </a:rPr>
+              <a:t>Lo siento mucho, en este momento …</a:t>
+            </a:r>
+          </a:p>
+        </p:txBody>
+      </p:sp>
+      <p:sp>
+        <p:nvSpPr>
+          <p:cNvPr id="35" name="Tarjeta 12"/>
+          <p:cNvSpPr/>
+          <p:nvPr/>
+        </p:nvSpPr>
+        <p:spPr>
+          <a:xfrm>
+            <a:off x="457200" y="5749290"/>
+            <a:ext cx="2708910" cy="898398"/>
+          </a:xfrm>
+          <a:prstGeom prst="roundRect">
+            <a:avLst>
+              <a:gd name="adj" fmla="val 6000"/>
+            </a:avLst>
+          </a:prstGeom>
+          <a:solidFill>
+            <a:srgbClr val="FFFFFF"/>
+          </a:solidFill>
+          <a:ln w="12700">
+            <a:solidFill>
+              <a:srgbClr val="E4E3DE"/>
+            </a:solidFill>
+          </a:ln>
+          <a:effectLst/>
+        </p:spPr>
+        <p:style>
+          <a:lnRef idx="1">
+            <a:schemeClr val="accent1"/>
+          </a:lnRef>
+          <a:fillRef idx="3">
+            <a:schemeClr val="accent1"/>
+          </a:fillRef>
+          <a:effectRef idx="2">
+            <a:schemeClr val="accent1"/>
+          </a:effectRef>
+          <a:fontRef idx="minor">
+            <a:schemeClr val="lt1"/>
+          </a:fontRef>
+        </p:style>
+        <p:txBody>
+          <a:bodyPr rtlCol="0" anchor="ctr"/>
+          <a:lstStyle/>
+          <a:p/>
+        </p:txBody>
+      </p:sp>
+      <p:sp>
+        <p:nvSpPr>
+          <p:cNvPr id="36" name="TarjetaTxt 12"/>
+          <p:cNvSpPr txBox="1"/>
+          <p:nvPr/>
+        </p:nvSpPr>
+        <p:spPr>
+          <a:xfrm>
+            <a:off x="548640" y="5804154"/>
+            <a:ext cx="2526030" cy="788670"/>
+          </a:xfrm>
+          <a:prstGeom prst="rect">
+            <a:avLst/>
+          </a:prstGeom>
+          <a:noFill/>
+        </p:spPr>
+        <p:txBody>
+          <a:bodyPr wrap="square" anchor="t" lIns="45720" rIns="45720" tIns="27432" bIns="27432">
+            <a:normAutofit/>
+          </a:bodyPr>
+          <a:lstStyle/>
+          <a:p>
+            <a:pPr algn="l"/>
+            <a:r>
+              <a:rPr sz="1100" b="1">
+                <a:solidFill>
+                  <a:srgbClr val="5B3E83"/>
+                </a:solidFill>
+                <a:latin typeface="Bricolage Grotesque"/>
+              </a:rPr>
+              <a:t>marco · mostrador</a:t>
+            </a:r>
+          </a:p>
+          <a:p>
+            <a:pPr algn="l"/>
+            <a:r>
+              <a:rPr sz="1000">
+                <a:solidFill>
+                  <a:srgbClr val="20242E"/>
+                </a:solidFill>
+                <a:latin typeface="Inter"/>
+              </a:rPr>
+              <a:t>Lo que sí puedo hacer es …</a:t>
+            </a:r>
+          </a:p>
+        </p:txBody>
+      </p:sp>
+      <p:sp>
+        <p:nvSpPr>
+          <p:cNvPr id="37" name="Tarjeta 13"/>
+          <p:cNvSpPr/>
+          <p:nvPr/>
+        </p:nvSpPr>
+        <p:spPr>
+          <a:xfrm>
+            <a:off x="3312414" y="5749290"/>
+            <a:ext cx="2708910" cy="898398"/>
+          </a:xfrm>
+          <a:prstGeom prst="roundRect">
+            <a:avLst>
+              <a:gd name="adj" fmla="val 6000"/>
+            </a:avLst>
+          </a:prstGeom>
+          <a:solidFill>
+            <a:srgbClr val="FFFFFF"/>
+          </a:solidFill>
+          <a:ln w="12700">
+            <a:solidFill>
+              <a:srgbClr val="E4E3DE"/>
+            </a:solidFill>
+          </a:ln>
+          <a:effectLst/>
+        </p:spPr>
+        <p:style>
+          <a:lnRef idx="1">
+            <a:schemeClr val="accent1"/>
+          </a:lnRef>
+          <a:fillRef idx="3">
+            <a:schemeClr val="accent1"/>
+          </a:fillRef>
+          <a:effectRef idx="2">
+            <a:schemeClr val="accent1"/>
+          </a:effectRef>
+          <a:fontRef idx="minor">
+            <a:schemeClr val="lt1"/>
+          </a:fontRef>
+        </p:style>
+        <p:txBody>
+          <a:bodyPr rtlCol="0" anchor="ctr"/>
+          <a:lstStyle/>
+          <a:p/>
+        </p:txBody>
+      </p:sp>
+      <p:sp>
+        <p:nvSpPr>
+          <p:cNvPr id="38" name="TarjetaTxt 13"/>
+          <p:cNvSpPr txBox="1"/>
+          <p:nvPr/>
+        </p:nvSpPr>
+        <p:spPr>
+          <a:xfrm>
+            <a:off x="3403854" y="5804154"/>
+            <a:ext cx="2526030" cy="788670"/>
+          </a:xfrm>
+          <a:prstGeom prst="rect">
+            <a:avLst/>
+          </a:prstGeom>
+          <a:noFill/>
+        </p:spPr>
+        <p:txBody>
+          <a:bodyPr wrap="square" anchor="t" lIns="45720" rIns="45720" tIns="27432" bIns="27432">
+            <a:normAutofit/>
+          </a:bodyPr>
+          <a:lstStyle/>
+          <a:p>
+            <a:pPr algn="l"/>
+            <a:r>
+              <a:rPr sz="1100" b="1">
+                <a:solidFill>
+                  <a:srgbClr val="5B3E83"/>
+                </a:solidFill>
+                <a:latin typeface="Bricolage Grotesque"/>
+              </a:rPr>
+              <a:t>marco · mostrador</a:t>
+            </a:r>
+          </a:p>
+          <a:p>
+            <a:pPr algn="l"/>
+            <a:r>
+              <a:rPr sz="1000">
+                <a:solidFill>
+                  <a:srgbClr val="20242E"/>
+                </a:solidFill>
+                <a:latin typeface="Inter"/>
+              </a:rPr>
+              <a:t>Deme un momento, lo compruebo.</a:t>
+            </a:r>
+          </a:p>
+        </p:txBody>
+      </p:sp>
+      <p:sp>
+        <p:nvSpPr>
+          <p:cNvPr id="39" name="Tarjeta 14"/>
+          <p:cNvSpPr/>
+          <p:nvPr/>
+        </p:nvSpPr>
+        <p:spPr>
+          <a:xfrm>
+            <a:off x="6167628" y="5749290"/>
+            <a:ext cx="2708910" cy="898398"/>
+          </a:xfrm>
+          <a:prstGeom prst="roundRect">
+            <a:avLst>
+              <a:gd name="adj" fmla="val 6000"/>
+            </a:avLst>
+          </a:prstGeom>
+          <a:solidFill>
+            <a:srgbClr val="FFFFFF"/>
+          </a:solidFill>
+          <a:ln w="12700">
+            <a:solidFill>
+              <a:srgbClr val="E4E3DE"/>
+            </a:solidFill>
+          </a:ln>
+          <a:effectLst/>
+        </p:spPr>
+        <p:style>
+          <a:lnRef idx="1">
+            <a:schemeClr val="accent1"/>
+          </a:lnRef>
+          <a:fillRef idx="3">
+            <a:schemeClr val="accent1"/>
+          </a:fillRef>
+          <a:effectRef idx="2">
+            <a:schemeClr val="accent1"/>
+          </a:effectRef>
+          <a:fontRef idx="minor">
+            <a:schemeClr val="lt1"/>
+          </a:fontRef>
+        </p:style>
+        <p:txBody>
+          <a:bodyPr rtlCol="0" anchor="ctr"/>
+          <a:lstStyle/>
+          <a:p/>
+        </p:txBody>
+      </p:sp>
+      <p:sp>
+        <p:nvSpPr>
+          <p:cNvPr id="40" name="TarjetaTxt 14"/>
+          <p:cNvSpPr txBox="1"/>
+          <p:nvPr/>
+        </p:nvSpPr>
+        <p:spPr>
+          <a:xfrm>
+            <a:off x="6259068" y="5804154"/>
+            <a:ext cx="2526030" cy="788670"/>
+          </a:xfrm>
+          <a:prstGeom prst="rect">
+            <a:avLst/>
+          </a:prstGeom>
+          <a:noFill/>
+        </p:spPr>
+        <p:txBody>
+          <a:bodyPr wrap="square" anchor="t" lIns="45720" rIns="45720" tIns="27432" bIns="27432">
+            <a:normAutofit/>
+          </a:bodyPr>
+          <a:lstStyle/>
+          <a:p>
+            <a:pPr algn="l"/>
+            <a:r>
+              <a:rPr sz="1100" b="1">
+                <a:solidFill>
+                  <a:srgbClr val="5B3E83"/>
+                </a:solidFill>
+                <a:latin typeface="Bricolage Grotesque"/>
+              </a:rPr>
+              <a:t>marco · mostrador</a:t>
+            </a:r>
+          </a:p>
+          <a:p>
+            <a:pPr algn="l"/>
+            <a:r>
+              <a:rPr sz="1000">
+                <a:solidFill>
+                  <a:srgbClr val="20242E"/>
+                </a:solidFill>
+                <a:latin typeface="Inter"/>
+              </a:rPr>
+              <a:t>Si es urgente, tengo otra opción.</a:t>
+            </a:r>
+          </a:p>
+        </p:txBody>
+      </p:sp>
+    </p:spTree>
+  </p:cSld>
+  <p:clrMapOvr>
+    <a:masterClrMapping/>
+  </p:clrMapOvr>
+</p:sld>
+</file>
+
+<file path=ppt/slides/slide22.xml><?xml version="1.0" encoding="utf-8"?>
+<p:sld xmlns:a="http://schemas.openxmlformats.org/drawingml/2006/main" xmlns:p="http://schemas.openxmlformats.org/presentationml/2006/main" xmlns:r="http://schemas.openxmlformats.org/officeDocument/2006/relationships">
+  <p:cSld>
+    <p:spTree>
+      <p:nvGrpSpPr>
+        <p:cNvPr id="1" name=""/>
+        <p:cNvGrpSpPr/>
+        <p:nvPr/>
+      </p:nvGrpSpPr>
+      <p:grpSpPr/>
+      <p:sp>
+        <p:nvSpPr>
+          <p:cNvPr id="2" name="Fondo"/>
+          <p:cNvSpPr/>
+          <p:nvPr/>
+        </p:nvSpPr>
+        <p:spPr>
+          <a:xfrm>
+            <a:off x="0" y="0"/>
+            <a:ext cx="12191695" cy="6858000"/>
+          </a:xfrm>
+          <a:prstGeom prst="rect">
+            <a:avLst/>
+          </a:prstGeom>
+          <a:solidFill>
+            <a:srgbClr val="FCFBF8"/>
+          </a:solidFill>
+          <a:ln>
+            <a:noFill/>
+          </a:ln>
+          <a:effectLst/>
+        </p:spPr>
+        <p:style>
+          <a:lnRef idx="1">
+            <a:schemeClr val="accent1"/>
+          </a:lnRef>
+          <a:fillRef idx="3">
+            <a:schemeClr val="accent1"/>
+          </a:fillRef>
+          <a:effectRef idx="2">
+            <a:schemeClr val="accent1"/>
+          </a:effectRef>
+          <a:fontRef idx="minor">
+            <a:schemeClr val="lt1"/>
+          </a:fontRef>
+        </p:style>
+        <p:txBody>
+          <a:bodyPr rtlCol="0" anchor="ctr"/>
+          <a:lstStyle/>
+          <a:p/>
+        </p:txBody>
+      </p:sp>
+      <p:sp>
+        <p:nvSpPr>
+          <p:cNvPr id="3" name="Cabecera"/>
+          <p:cNvSpPr/>
+          <p:nvPr/>
+        </p:nvSpPr>
+        <p:spPr>
+          <a:xfrm>
+            <a:off x="0" y="0"/>
+            <a:ext cx="12191695" cy="1078992"/>
+          </a:xfrm>
+          <a:prstGeom prst="rect">
+            <a:avLst/>
+          </a:prstGeom>
+          <a:solidFill>
+            <a:srgbClr val="7C56A9"/>
+          </a:solidFill>
+          <a:ln>
+            <a:noFill/>
+          </a:ln>
+          <a:effectLst/>
+        </p:spPr>
+        <p:style>
+          <a:lnRef idx="1">
+            <a:schemeClr val="accent1"/>
+          </a:lnRef>
+          <a:fillRef idx="3">
+            <a:schemeClr val="accent1"/>
+          </a:fillRef>
+          <a:effectRef idx="2">
+            <a:schemeClr val="accent1"/>
+          </a:effectRef>
+          <a:fontRef idx="minor">
+            <a:schemeClr val="lt1"/>
+          </a:fontRef>
+        </p:style>
+        <p:txBody>
+          <a:bodyPr rtlCol="0" anchor="ctr"/>
+          <a:lstStyle/>
+          <a:p/>
+        </p:txBody>
+      </p:sp>
+      <p:sp>
+        <p:nvSpPr>
+          <p:cNvPr id="4" name="Chip"/>
+          <p:cNvSpPr/>
+          <p:nvPr/>
+        </p:nvSpPr>
+        <p:spPr>
+          <a:xfrm>
+            <a:off x="457200" y="182880"/>
+            <a:ext cx="3017520" cy="292608"/>
+          </a:xfrm>
+          <a:prstGeom prst="roundRect">
+            <a:avLst>
+              <a:gd name="adj" fmla="val 50000"/>
+            </a:avLst>
+          </a:prstGeom>
+          <a:solidFill>
+            <a:srgbClr val="FFFFFF"/>
+          </a:solidFill>
+          <a:ln>
+            <a:noFill/>
+          </a:ln>
+          <a:effectLst/>
+        </p:spPr>
+        <p:style>
+          <a:lnRef idx="1">
+            <a:schemeClr val="accent1"/>
+          </a:lnRef>
+          <a:fillRef idx="3">
+            <a:schemeClr val="accent1"/>
+          </a:fillRef>
+          <a:effectRef idx="2">
+            <a:schemeClr val="accent1"/>
+          </a:effectRef>
+          <a:fontRef idx="minor">
+            <a:schemeClr val="lt1"/>
+          </a:fontRef>
+        </p:style>
+        <p:txBody>
+          <a:bodyPr rtlCol="0" anchor="ctr"/>
+          <a:lstStyle/>
+          <a:p/>
+        </p:txBody>
+      </p:sp>
+      <p:sp>
+        <p:nvSpPr>
+          <p:cNvPr id="5" name="ChipTxt"/>
+          <p:cNvSpPr txBox="1"/>
+          <p:nvPr/>
+        </p:nvSpPr>
+        <p:spPr>
+          <a:xfrm>
+            <a:off x="457200" y="173736"/>
+            <a:ext cx="3017520" cy="310896"/>
+          </a:xfrm>
+          <a:prstGeom prst="rect">
+            <a:avLst/>
+          </a:prstGeom>
+          <a:noFill/>
+        </p:spPr>
+        <p:txBody>
+          <a:bodyPr wrap="square" anchor="ctr" lIns="45720" rIns="45720" tIns="27432" bIns="27432">
+            <a:normAutofit/>
+          </a:bodyPr>
+          <a:lstStyle/>
+          <a:p>
+            <a:pPr algn="ctr"/>
+            <a:r>
+              <a:rPr sz="950" b="1">
+                <a:solidFill>
+                  <a:srgbClr val="5B3E83"/>
+                </a:solidFill>
+                <a:latin typeface="Inter"/>
+              </a:rPr>
+              <a:t>RETO 3 · ONDERZOEK &amp; DATA</a:t>
+            </a:r>
+          </a:p>
+        </p:txBody>
+      </p:sp>
+      <p:sp>
+        <p:nvSpPr>
+          <p:cNvPr id="6" name="Titulo"/>
+          <p:cNvSpPr txBox="1"/>
+          <p:nvPr/>
+        </p:nvSpPr>
+        <p:spPr>
+          <a:xfrm>
+            <a:off x="457200" y="502920"/>
+            <a:ext cx="8412480" cy="475488"/>
+          </a:xfrm>
+          <a:prstGeom prst="rect">
+            <a:avLst/>
+          </a:prstGeom>
+          <a:noFill/>
+        </p:spPr>
+        <p:txBody>
+          <a:bodyPr wrap="square" anchor="t" lIns="45720" rIns="45720" tIns="27432" bIns="27432">
+            <a:normAutofit/>
+          </a:bodyPr>
+          <a:lstStyle/>
+          <a:p>
+            <a:pPr algn="l"/>
+            <a:r>
+              <a:rPr sz="2700" b="1">
+                <a:solidFill>
+                  <a:srgbClr val="FFFFFF"/>
+                </a:solidFill>
+                <a:latin typeface="Bricolage Grotesque"/>
+              </a:rPr>
+              <a:t>Presupuesto de mochilero</a:t>
+            </a:r>
+          </a:p>
+        </p:txBody>
+      </p:sp>
+      <p:sp>
+        <p:nvSpPr>
+          <p:cNvPr id="7" name="Badges"/>
+          <p:cNvSpPr txBox="1"/>
+          <p:nvPr/>
+        </p:nvSpPr>
+        <p:spPr>
+          <a:xfrm>
+            <a:off x="9052560" y="256032"/>
+            <a:ext cx="2651760" cy="640080"/>
+          </a:xfrm>
+          <a:prstGeom prst="rect">
+            <a:avLst/>
+          </a:prstGeom>
+          <a:noFill/>
+        </p:spPr>
+        <p:txBody>
+          <a:bodyPr wrap="square" anchor="t" lIns="45720" rIns="45720" tIns="27432" bIns="27432">
+            <a:normAutofit/>
+          </a:bodyPr>
+          <a:lstStyle/>
+          <a:p>
+            <a:pPr algn="r"/>
+            <a:r>
+              <a:rPr sz="1000">
+                <a:solidFill>
+                  <a:srgbClr val="EEE8F5"/>
+                </a:solidFill>
+                <a:latin typeface="Inter"/>
+              </a:rPr>
+              <a:t>👨‍👩‍👧 En grupos</a:t>
+            </a:r>
+          </a:p>
+          <a:p>
+            <a:pPr algn="r"/>
+            <a:r>
+              <a:rPr sz="1000">
+                <a:solidFill>
+                  <a:srgbClr val="EEE8F5"/>
+                </a:solidFill>
+                <a:latin typeface="Inter"/>
+              </a:rPr>
+              <a:t>± 18 min · ★★★</a:t>
+            </a:r>
+          </a:p>
+        </p:txBody>
+      </p:sp>
+      <p:sp>
+        <p:nvSpPr>
+          <p:cNvPr id="8" name="Gancho"/>
+          <p:cNvSpPr txBox="1"/>
+          <p:nvPr/>
+        </p:nvSpPr>
+        <p:spPr>
+          <a:xfrm>
+            <a:off x="457200" y="1225296"/>
+            <a:ext cx="11274552" cy="566928"/>
+          </a:xfrm>
+          <a:prstGeom prst="rect">
+            <a:avLst/>
+          </a:prstGeom>
+          <a:noFill/>
+        </p:spPr>
+        <p:txBody>
+          <a:bodyPr wrap="square" anchor="t" lIns="45720" rIns="45720" tIns="27432" bIns="27432">
+            <a:normAutofit/>
+          </a:bodyPr>
+          <a:lstStyle/>
+          <a:p>
+            <a:pPr algn="l"/>
+            <a:r>
+              <a:rPr sz="1600" b="1">
+                <a:solidFill>
+                  <a:srgbClr val="5B3E83"/>
+                </a:solidFill>
+                <a:latin typeface="Bricolage Grotesque"/>
+              </a:rPr>
+              <a:t>Diez días, tres países, seiscientos euros. Y hay que dormir en algún sitio.</a:t>
+            </a:r>
+          </a:p>
+          <a:p>
+            <a:pPr algn="l"/>
+            <a:r>
+              <a:rPr sz="1100" i="1">
+                <a:solidFill>
+                  <a:srgbClr val="6A6E78"/>
+                </a:solidFill>
+                <a:latin typeface="Inter"/>
+              </a:rPr>
+              <a:t>Tien dagen, drie landen, zeshonderd euro. En slapen moet ergens.</a:t>
+            </a:r>
+          </a:p>
+        </p:txBody>
+      </p:sp>
+      <p:sp>
+        <p:nvSpPr>
+          <p:cNvPr id="9" name="ReglaCaja"/>
+          <p:cNvSpPr/>
+          <p:nvPr/>
+        </p:nvSpPr>
+        <p:spPr>
+          <a:xfrm>
+            <a:off x="457200" y="1847088"/>
+            <a:ext cx="11274552" cy="658368"/>
+          </a:xfrm>
+          <a:prstGeom prst="roundRect">
+            <a:avLst>
+              <a:gd name="adj" fmla="val 5000"/>
+            </a:avLst>
+          </a:prstGeom>
+          <a:solidFill>
+            <a:srgbClr val="FBF3D6"/>
+          </a:solidFill>
+          <a:ln>
+            <a:noFill/>
+          </a:ln>
+          <a:effectLst/>
+        </p:spPr>
+        <p:style>
+          <a:lnRef idx="1">
+            <a:schemeClr val="accent1"/>
+          </a:lnRef>
+          <a:fillRef idx="3">
+            <a:schemeClr val="accent1"/>
+          </a:fillRef>
+          <a:effectRef idx="2">
+            <a:schemeClr val="accent1"/>
+          </a:effectRef>
+          <a:fontRef idx="minor">
+            <a:schemeClr val="lt1"/>
+          </a:fontRef>
+        </p:style>
+        <p:txBody>
+          <a:bodyPr rtlCol="0" anchor="ctr"/>
+          <a:lstStyle/>
+          <a:p/>
+        </p:txBody>
+      </p:sp>
+      <p:sp>
+        <p:nvSpPr>
+          <p:cNvPr id="10" name="ReglaTxt"/>
+          <p:cNvSpPr txBox="1"/>
+          <p:nvPr/>
+        </p:nvSpPr>
+        <p:spPr>
+          <a:xfrm>
+            <a:off x="603504" y="1883664"/>
+            <a:ext cx="10972800" cy="585216"/>
+          </a:xfrm>
+          <a:prstGeom prst="rect">
+            <a:avLst/>
+          </a:prstGeom>
+          <a:noFill/>
+        </p:spPr>
+        <p:txBody>
+          <a:bodyPr wrap="square" anchor="t" lIns="45720" rIns="45720" tIns="27432" bIns="27432">
+            <a:normAutofit/>
+          </a:bodyPr>
+          <a:lstStyle/>
+          <a:p>
+            <a:pPr algn="l"/>
+            <a:r>
+              <a:rPr sz="850" b="1">
+                <a:solidFill>
+                  <a:srgbClr val="B7860B"/>
+                </a:solidFill>
+                <a:latin typeface="Inter"/>
+              </a:rPr>
+              <a:t>LA REGLA DEL RETO</a:t>
+            </a:r>
+          </a:p>
+          <a:p>
+            <a:pPr algn="l"/>
+            <a:r>
+              <a:rPr sz="1100">
+                <a:solidFill>
+                  <a:srgbClr val="20242E"/>
+                </a:solidFill>
+                <a:latin typeface="Inter"/>
+              </a:rPr>
+              <a:t>Zeshonderd euro, geen cent meer, en tien nachten moeten gedekt zijn. Elke uitgave wordt verantwoord met «por» (het bedrag, de ruil) of «para» (het doel).</a:t>
+            </a:r>
+          </a:p>
+        </p:txBody>
+      </p:sp>
+      <p:sp>
+        <p:nvSpPr>
+          <p:cNvPr id="11" name="Tarjeta 0"/>
+          <p:cNvSpPr/>
+          <p:nvPr/>
+        </p:nvSpPr>
+        <p:spPr>
+          <a:xfrm>
+            <a:off x="457200" y="2670048"/>
+            <a:ext cx="2708910" cy="1170432"/>
+          </a:xfrm>
+          <a:prstGeom prst="roundRect">
+            <a:avLst>
+              <a:gd name="adj" fmla="val 6000"/>
+            </a:avLst>
+          </a:prstGeom>
+          <a:solidFill>
+            <a:srgbClr val="FFFFFF"/>
+          </a:solidFill>
+          <a:ln w="12700">
+            <a:solidFill>
+              <a:srgbClr val="E4E3DE"/>
+            </a:solidFill>
+          </a:ln>
+          <a:effectLst/>
+        </p:spPr>
+        <p:style>
+          <a:lnRef idx="1">
+            <a:schemeClr val="accent1"/>
+          </a:lnRef>
+          <a:fillRef idx="3">
+            <a:schemeClr val="accent1"/>
+          </a:fillRef>
+          <a:effectRef idx="2">
+            <a:schemeClr val="accent1"/>
+          </a:effectRef>
+          <a:fontRef idx="minor">
+            <a:schemeClr val="lt1"/>
+          </a:fontRef>
+        </p:style>
+        <p:txBody>
+          <a:bodyPr rtlCol="0" anchor="ctr"/>
+          <a:lstStyle/>
+          <a:p/>
+        </p:txBody>
+      </p:sp>
+      <p:sp>
+        <p:nvSpPr>
+          <p:cNvPr id="12" name="TarjetaTxt 0"/>
+          <p:cNvSpPr txBox="1"/>
+          <p:nvPr/>
+        </p:nvSpPr>
+        <p:spPr>
+          <a:xfrm>
+            <a:off x="548640" y="2724912"/>
+            <a:ext cx="2526030" cy="1060704"/>
+          </a:xfrm>
+          <a:prstGeom prst="rect">
+            <a:avLst/>
+          </a:prstGeom>
+          <a:noFill/>
+        </p:spPr>
+        <p:txBody>
+          <a:bodyPr wrap="square" anchor="t" lIns="45720" rIns="45720" tIns="27432" bIns="27432">
+            <a:normAutofit/>
+          </a:bodyPr>
+          <a:lstStyle/>
+          <a:p>
+            <a:pPr algn="l"/>
+            <a:r>
+              <a:rPr sz="1100" b="1">
+                <a:solidFill>
+                  <a:srgbClr val="5B3E83"/>
+                </a:solidFill>
+                <a:latin typeface="Bricolage Grotesque"/>
+              </a:rPr>
+              <a:t>Precios</a:t>
+            </a:r>
+          </a:p>
+          <a:p>
+            <a:pPr algn="l"/>
+            <a:r>
+              <a:rPr sz="1000">
+                <a:solidFill>
+                  <a:srgbClr val="20242E"/>
+                </a:solidFill>
+                <a:latin typeface="Inter"/>
+              </a:rPr>
+              <a:t>Chile · hostal: unos 18 € la noche · Chile · comida del día: unos 9 € · Chile · bus largo (10 h): unos 30 €</a:t>
+            </a:r>
+          </a:p>
+        </p:txBody>
+      </p:sp>
+      <p:sp>
+        <p:nvSpPr>
+          <p:cNvPr id="13" name="Tarjeta 1"/>
+          <p:cNvSpPr/>
+          <p:nvPr/>
+        </p:nvSpPr>
+        <p:spPr>
+          <a:xfrm>
+            <a:off x="3312414" y="2670048"/>
+            <a:ext cx="2708910" cy="1170432"/>
+          </a:xfrm>
+          <a:prstGeom prst="roundRect">
+            <a:avLst>
+              <a:gd name="adj" fmla="val 6000"/>
+            </a:avLst>
+          </a:prstGeom>
+          <a:solidFill>
+            <a:srgbClr val="FFFFFF"/>
+          </a:solidFill>
+          <a:ln w="12700">
+            <a:solidFill>
+              <a:srgbClr val="E4E3DE"/>
+            </a:solidFill>
+          </a:ln>
+          <a:effectLst/>
+        </p:spPr>
+        <p:style>
+          <a:lnRef idx="1">
+            <a:schemeClr val="accent1"/>
+          </a:lnRef>
+          <a:fillRef idx="3">
+            <a:schemeClr val="accent1"/>
+          </a:fillRef>
+          <a:effectRef idx="2">
+            <a:schemeClr val="accent1"/>
+          </a:effectRef>
+          <a:fontRef idx="minor">
+            <a:schemeClr val="lt1"/>
+          </a:fontRef>
+        </p:style>
+        <p:txBody>
+          <a:bodyPr rtlCol="0" anchor="ctr"/>
+          <a:lstStyle/>
+          <a:p/>
+        </p:txBody>
+      </p:sp>
+      <p:sp>
+        <p:nvSpPr>
+          <p:cNvPr id="14" name="TarjetaTxt 1"/>
+          <p:cNvSpPr txBox="1"/>
+          <p:nvPr/>
+        </p:nvSpPr>
+        <p:spPr>
+          <a:xfrm>
+            <a:off x="3403854" y="2724912"/>
+            <a:ext cx="2526030" cy="1060704"/>
+          </a:xfrm>
+          <a:prstGeom prst="rect">
+            <a:avLst/>
+          </a:prstGeom>
+          <a:noFill/>
+        </p:spPr>
+        <p:txBody>
+          <a:bodyPr wrap="square" anchor="t" lIns="45720" rIns="45720" tIns="27432" bIns="27432">
+            <a:normAutofit/>
+          </a:bodyPr>
+          <a:lstStyle/>
+          <a:p>
+            <a:pPr algn="l"/>
+            <a:r>
+              <a:rPr sz="1100" b="1">
+                <a:solidFill>
+                  <a:srgbClr val="5B3E83"/>
+                </a:solidFill>
+                <a:latin typeface="Bricolage Grotesque"/>
+              </a:rPr>
+              <a:t>Precios</a:t>
+            </a:r>
+          </a:p>
+          <a:p>
+            <a:pPr algn="l"/>
+            <a:r>
+              <a:rPr sz="1000">
+                <a:solidFill>
+                  <a:srgbClr val="20242E"/>
+                </a:solidFill>
+                <a:latin typeface="Inter"/>
+              </a:rPr>
+              <a:t>Perú · hostal: unos 11 € la noche · Perú · comida del día: unos 6 € · Perú · bus largo (10 h): unos 18 €</a:t>
+            </a:r>
+          </a:p>
+        </p:txBody>
+      </p:sp>
+      <p:sp>
+        <p:nvSpPr>
+          <p:cNvPr id="15" name="Tarjeta 2"/>
+          <p:cNvSpPr/>
+          <p:nvPr/>
+        </p:nvSpPr>
+        <p:spPr>
+          <a:xfrm>
+            <a:off x="6167628" y="2670048"/>
+            <a:ext cx="2708910" cy="1170432"/>
+          </a:xfrm>
+          <a:prstGeom prst="roundRect">
+            <a:avLst>
+              <a:gd name="adj" fmla="val 6000"/>
+            </a:avLst>
+          </a:prstGeom>
+          <a:solidFill>
+            <a:srgbClr val="FFFFFF"/>
+          </a:solidFill>
+          <a:ln w="12700">
+            <a:solidFill>
+              <a:srgbClr val="E4E3DE"/>
+            </a:solidFill>
+          </a:ln>
+          <a:effectLst/>
+        </p:spPr>
+        <p:style>
+          <a:lnRef idx="1">
+            <a:schemeClr val="accent1"/>
+          </a:lnRef>
+          <a:fillRef idx="3">
+            <a:schemeClr val="accent1"/>
+          </a:fillRef>
+          <a:effectRef idx="2">
+            <a:schemeClr val="accent1"/>
+          </a:effectRef>
+          <a:fontRef idx="minor">
+            <a:schemeClr val="lt1"/>
+          </a:fontRef>
+        </p:style>
+        <p:txBody>
+          <a:bodyPr rtlCol="0" anchor="ctr"/>
+          <a:lstStyle/>
+          <a:p/>
+        </p:txBody>
+      </p:sp>
+      <p:sp>
+        <p:nvSpPr>
+          <p:cNvPr id="16" name="TarjetaTxt 2"/>
+          <p:cNvSpPr txBox="1"/>
+          <p:nvPr/>
+        </p:nvSpPr>
+        <p:spPr>
+          <a:xfrm>
+            <a:off x="6259068" y="2724912"/>
+            <a:ext cx="2526030" cy="1060704"/>
+          </a:xfrm>
+          <a:prstGeom prst="rect">
+            <a:avLst/>
+          </a:prstGeom>
+          <a:noFill/>
+        </p:spPr>
+        <p:txBody>
+          <a:bodyPr wrap="square" anchor="t" lIns="45720" rIns="45720" tIns="27432" bIns="27432">
+            <a:normAutofit/>
+          </a:bodyPr>
+          <a:lstStyle/>
+          <a:p>
+            <a:pPr algn="l"/>
+            <a:r>
+              <a:rPr sz="1100" b="1">
+                <a:solidFill>
+                  <a:srgbClr val="5B3E83"/>
+                </a:solidFill>
+                <a:latin typeface="Bricolage Grotesque"/>
+              </a:rPr>
+              <a:t>Precios</a:t>
+            </a:r>
+          </a:p>
+          <a:p>
+            <a:pPr algn="l"/>
+            <a:r>
+              <a:rPr sz="1000">
+                <a:solidFill>
+                  <a:srgbClr val="20242E"/>
+                </a:solidFill>
+                <a:latin typeface="Inter"/>
+              </a:rPr>
+              <a:t>Bolivia · hostal: unos 8 € la noche · Bolivia · comida del día: unos 5 € · Bolivia · bus largo (10 h): unos 12 €</a:t>
+            </a:r>
+          </a:p>
+        </p:txBody>
+      </p:sp>
+      <p:sp>
+        <p:nvSpPr>
+          <p:cNvPr id="17" name="Tarjeta 3"/>
+          <p:cNvSpPr/>
+          <p:nvPr/>
+        </p:nvSpPr>
+        <p:spPr>
+          <a:xfrm>
+            <a:off x="9022842" y="2670048"/>
+            <a:ext cx="2708910" cy="1170432"/>
+          </a:xfrm>
+          <a:prstGeom prst="roundRect">
+            <a:avLst>
+              <a:gd name="adj" fmla="val 6000"/>
+            </a:avLst>
+          </a:prstGeom>
+          <a:solidFill>
+            <a:srgbClr val="FFFFFF"/>
+          </a:solidFill>
+          <a:ln w="12700">
+            <a:solidFill>
+              <a:srgbClr val="E4E3DE"/>
+            </a:solidFill>
+          </a:ln>
+          <a:effectLst/>
+        </p:spPr>
+        <p:style>
+          <a:lnRef idx="1">
+            <a:schemeClr val="accent1"/>
+          </a:lnRef>
+          <a:fillRef idx="3">
+            <a:schemeClr val="accent1"/>
+          </a:fillRef>
+          <a:effectRef idx="2">
+            <a:schemeClr val="accent1"/>
+          </a:effectRef>
+          <a:fontRef idx="minor">
+            <a:schemeClr val="lt1"/>
+          </a:fontRef>
+        </p:style>
+        <p:txBody>
+          <a:bodyPr rtlCol="0" anchor="ctr"/>
+          <a:lstStyle/>
+          <a:p/>
+        </p:txBody>
+      </p:sp>
+      <p:sp>
+        <p:nvSpPr>
+          <p:cNvPr id="18" name="TarjetaTxt 3"/>
+          <p:cNvSpPr txBox="1"/>
+          <p:nvPr/>
+        </p:nvSpPr>
+        <p:spPr>
+          <a:xfrm>
+            <a:off x="9114282" y="2724912"/>
+            <a:ext cx="2526030" cy="1060704"/>
+          </a:xfrm>
+          <a:prstGeom prst="rect">
+            <a:avLst/>
+          </a:prstGeom>
+          <a:noFill/>
+        </p:spPr>
+        <p:txBody>
+          <a:bodyPr wrap="square" anchor="t" lIns="45720" rIns="45720" tIns="27432" bIns="27432">
+            <a:normAutofit/>
+          </a:bodyPr>
+          <a:lstStyle/>
+          <a:p>
+            <a:pPr algn="l"/>
+            <a:r>
+              <a:rPr sz="1100" b="1">
+                <a:solidFill>
+                  <a:srgbClr val="5B3E83"/>
+                </a:solidFill>
+                <a:latin typeface="Bricolage Grotesque"/>
+              </a:rPr>
+              <a:t>Precios</a:t>
+            </a:r>
+          </a:p>
+          <a:p>
+            <a:pPr algn="l"/>
+            <a:r>
+              <a:rPr sz="1000">
+                <a:solidFill>
+                  <a:srgbClr val="20242E"/>
+                </a:solidFill>
+                <a:latin typeface="Inter"/>
+              </a:rPr>
+              <a:t>entrada a un parque nacional: entre 15 € y 40 € · vuelo interno: entre 60 € y 120 €</a:t>
+            </a:r>
+          </a:p>
+        </p:txBody>
+      </p:sp>
+      <p:sp>
+        <p:nvSpPr>
+          <p:cNvPr id="19" name="Tarjeta 4"/>
+          <p:cNvSpPr/>
+          <p:nvPr/>
+        </p:nvSpPr>
+        <p:spPr>
+          <a:xfrm>
+            <a:off x="457200" y="3968496"/>
+            <a:ext cx="2708910" cy="1170432"/>
+          </a:xfrm>
+          <a:prstGeom prst="roundRect">
+            <a:avLst>
+              <a:gd name="adj" fmla="val 6000"/>
+            </a:avLst>
+          </a:prstGeom>
+          <a:solidFill>
+            <a:srgbClr val="FFFFFF"/>
+          </a:solidFill>
+          <a:ln w="12700">
+            <a:solidFill>
+              <a:srgbClr val="E4E3DE"/>
+            </a:solidFill>
+          </a:ln>
+          <a:effectLst/>
+        </p:spPr>
+        <p:style>
+          <a:lnRef idx="1">
+            <a:schemeClr val="accent1"/>
+          </a:lnRef>
+          <a:fillRef idx="3">
+            <a:schemeClr val="accent1"/>
+          </a:fillRef>
+          <a:effectRef idx="2">
+            <a:schemeClr val="accent1"/>
+          </a:effectRef>
+          <a:fontRef idx="minor">
+            <a:schemeClr val="lt1"/>
+          </a:fontRef>
+        </p:style>
+        <p:txBody>
+          <a:bodyPr rtlCol="0" anchor="ctr"/>
+          <a:lstStyle/>
+          <a:p/>
+        </p:txBody>
+      </p:sp>
+      <p:sp>
+        <p:nvSpPr>
+          <p:cNvPr id="20" name="TarjetaTxt 4"/>
+          <p:cNvSpPr txBox="1"/>
+          <p:nvPr/>
+        </p:nvSpPr>
+        <p:spPr>
+          <a:xfrm>
+            <a:off x="548640" y="4023360"/>
+            <a:ext cx="2526030" cy="1060704"/>
+          </a:xfrm>
+          <a:prstGeom prst="rect">
+            <a:avLst/>
+          </a:prstGeom>
+          <a:noFill/>
+        </p:spPr>
+        <p:txBody>
+          <a:bodyPr wrap="square" anchor="t" lIns="45720" rIns="45720" tIns="27432" bIns="27432">
+            <a:normAutofit/>
+          </a:bodyPr>
+          <a:lstStyle/>
+          <a:p>
+            <a:pPr algn="l"/>
+            <a:r>
+              <a:rPr sz="1100" b="1">
+                <a:solidFill>
+                  <a:srgbClr val="5B3E83"/>
+                </a:solidFill>
+                <a:latin typeface="Bricolage Grotesque"/>
+              </a:rPr>
+              <a:t>marco</a:t>
+            </a:r>
+          </a:p>
+          <a:p>
+            <a:pPr algn="l"/>
+            <a:r>
+              <a:rPr sz="1000">
+                <a:solidFill>
+                  <a:srgbClr val="20242E"/>
+                </a:solidFill>
+                <a:latin typeface="Inter"/>
+              </a:rPr>
+              <a:t>Vamos en bus por … euros.</a:t>
+            </a:r>
+          </a:p>
+        </p:txBody>
+      </p:sp>
+      <p:sp>
+        <p:nvSpPr>
+          <p:cNvPr id="21" name="Tarjeta 5"/>
+          <p:cNvSpPr/>
+          <p:nvPr/>
+        </p:nvSpPr>
+        <p:spPr>
+          <a:xfrm>
+            <a:off x="3312414" y="3968496"/>
+            <a:ext cx="2708910" cy="1170432"/>
+          </a:xfrm>
+          <a:prstGeom prst="roundRect">
+            <a:avLst>
+              <a:gd name="adj" fmla="val 6000"/>
+            </a:avLst>
+          </a:prstGeom>
+          <a:solidFill>
+            <a:srgbClr val="FFFFFF"/>
+          </a:solidFill>
+          <a:ln w="12700">
+            <a:solidFill>
+              <a:srgbClr val="E4E3DE"/>
+            </a:solidFill>
+          </a:ln>
+          <a:effectLst/>
+        </p:spPr>
+        <p:style>
+          <a:lnRef idx="1">
+            <a:schemeClr val="accent1"/>
+          </a:lnRef>
+          <a:fillRef idx="3">
+            <a:schemeClr val="accent1"/>
+          </a:fillRef>
+          <a:effectRef idx="2">
+            <a:schemeClr val="accent1"/>
+          </a:effectRef>
+          <a:fontRef idx="minor">
+            <a:schemeClr val="lt1"/>
+          </a:fontRef>
+        </p:style>
+        <p:txBody>
+          <a:bodyPr rtlCol="0" anchor="ctr"/>
+          <a:lstStyle/>
+          <a:p/>
+        </p:txBody>
+      </p:sp>
+      <p:sp>
+        <p:nvSpPr>
+          <p:cNvPr id="22" name="TarjetaTxt 5"/>
+          <p:cNvSpPr txBox="1"/>
+          <p:nvPr/>
+        </p:nvSpPr>
+        <p:spPr>
+          <a:xfrm>
+            <a:off x="3403854" y="4023360"/>
+            <a:ext cx="2526030" cy="1060704"/>
+          </a:xfrm>
+          <a:prstGeom prst="rect">
+            <a:avLst/>
+          </a:prstGeom>
+          <a:noFill/>
+        </p:spPr>
+        <p:txBody>
+          <a:bodyPr wrap="square" anchor="t" lIns="45720" rIns="45720" tIns="27432" bIns="27432">
+            <a:normAutofit/>
+          </a:bodyPr>
+          <a:lstStyle/>
+          <a:p>
+            <a:pPr algn="l"/>
+            <a:r>
+              <a:rPr sz="1100" b="1">
+                <a:solidFill>
+                  <a:srgbClr val="5B3E83"/>
+                </a:solidFill>
+                <a:latin typeface="Bricolage Grotesque"/>
+              </a:rPr>
+              <a:t>marco</a:t>
+            </a:r>
+          </a:p>
+          <a:p>
+            <a:pPr algn="l"/>
+            <a:r>
+              <a:rPr sz="1000">
+                <a:solidFill>
+                  <a:srgbClr val="20242E"/>
+                </a:solidFill>
+                <a:latin typeface="Inter"/>
+              </a:rPr>
+              <a:t>Reservamos … para dormir en …</a:t>
+            </a:r>
+          </a:p>
+        </p:txBody>
+      </p:sp>
+      <p:sp>
+        <p:nvSpPr>
+          <p:cNvPr id="23" name="Tarjeta 6"/>
+          <p:cNvSpPr/>
+          <p:nvPr/>
+        </p:nvSpPr>
+        <p:spPr>
+          <a:xfrm>
+            <a:off x="6167628" y="3968496"/>
+            <a:ext cx="2708910" cy="1170432"/>
+          </a:xfrm>
+          <a:prstGeom prst="roundRect">
+            <a:avLst>
+              <a:gd name="adj" fmla="val 6000"/>
+            </a:avLst>
+          </a:prstGeom>
+          <a:solidFill>
+            <a:srgbClr val="FFFFFF"/>
+          </a:solidFill>
+          <a:ln w="12700">
+            <a:solidFill>
+              <a:srgbClr val="E4E3DE"/>
+            </a:solidFill>
+          </a:ln>
+          <a:effectLst/>
+        </p:spPr>
+        <p:style>
+          <a:lnRef idx="1">
+            <a:schemeClr val="accent1"/>
+          </a:lnRef>
+          <a:fillRef idx="3">
+            <a:schemeClr val="accent1"/>
+          </a:fillRef>
+          <a:effectRef idx="2">
+            <a:schemeClr val="accent1"/>
+          </a:effectRef>
+          <a:fontRef idx="minor">
+            <a:schemeClr val="lt1"/>
+          </a:fontRef>
+        </p:style>
+        <p:txBody>
+          <a:bodyPr rtlCol="0" anchor="ctr"/>
+          <a:lstStyle/>
+          <a:p/>
+        </p:txBody>
+      </p:sp>
+      <p:sp>
+        <p:nvSpPr>
+          <p:cNvPr id="24" name="TarjetaTxt 6"/>
+          <p:cNvSpPr txBox="1"/>
+          <p:nvPr/>
+        </p:nvSpPr>
+        <p:spPr>
+          <a:xfrm>
+            <a:off x="6259068" y="4023360"/>
+            <a:ext cx="2526030" cy="1060704"/>
+          </a:xfrm>
+          <a:prstGeom prst="rect">
+            <a:avLst/>
+          </a:prstGeom>
+          <a:noFill/>
+        </p:spPr>
+        <p:txBody>
+          <a:bodyPr wrap="square" anchor="t" lIns="45720" rIns="45720" tIns="27432" bIns="27432">
+            <a:normAutofit/>
+          </a:bodyPr>
+          <a:lstStyle/>
+          <a:p>
+            <a:pPr algn="l"/>
+            <a:r>
+              <a:rPr sz="1100" b="1">
+                <a:solidFill>
+                  <a:srgbClr val="5B3E83"/>
+                </a:solidFill>
+                <a:latin typeface="Bricolage Grotesque"/>
+              </a:rPr>
+              <a:t>marco</a:t>
+            </a:r>
+          </a:p>
+          <a:p>
+            <a:pPr algn="l"/>
+            <a:r>
+              <a:rPr sz="1000">
+                <a:solidFill>
+                  <a:srgbClr val="20242E"/>
+                </a:solidFill>
+                <a:latin typeface="Inter"/>
+              </a:rPr>
+              <a:t>Cambiamos el vuelo por el bus, porque …</a:t>
+            </a:r>
+          </a:p>
+        </p:txBody>
+      </p:sp>
+      <p:sp>
+        <p:nvSpPr>
+          <p:cNvPr id="25" name="Tarjeta 7"/>
+          <p:cNvSpPr/>
+          <p:nvPr/>
+        </p:nvSpPr>
+        <p:spPr>
+          <a:xfrm>
+            <a:off x="9022842" y="3968496"/>
+            <a:ext cx="2708910" cy="1170432"/>
+          </a:xfrm>
+          <a:prstGeom prst="roundRect">
+            <a:avLst>
+              <a:gd name="adj" fmla="val 6000"/>
+            </a:avLst>
+          </a:prstGeom>
+          <a:solidFill>
+            <a:srgbClr val="FFFFFF"/>
+          </a:solidFill>
+          <a:ln w="12700">
+            <a:solidFill>
+              <a:srgbClr val="E4E3DE"/>
+            </a:solidFill>
+          </a:ln>
+          <a:effectLst/>
+        </p:spPr>
+        <p:style>
+          <a:lnRef idx="1">
+            <a:schemeClr val="accent1"/>
+          </a:lnRef>
+          <a:fillRef idx="3">
+            <a:schemeClr val="accent1"/>
+          </a:fillRef>
+          <a:effectRef idx="2">
+            <a:schemeClr val="accent1"/>
+          </a:effectRef>
+          <a:fontRef idx="minor">
+            <a:schemeClr val="lt1"/>
+          </a:fontRef>
+        </p:style>
+        <p:txBody>
+          <a:bodyPr rtlCol="0" anchor="ctr"/>
+          <a:lstStyle/>
+          <a:p/>
+        </p:txBody>
+      </p:sp>
+      <p:sp>
+        <p:nvSpPr>
+          <p:cNvPr id="26" name="TarjetaTxt 7"/>
+          <p:cNvSpPr txBox="1"/>
+          <p:nvPr/>
+        </p:nvSpPr>
+        <p:spPr>
+          <a:xfrm>
+            <a:off x="9114282" y="4023360"/>
+            <a:ext cx="2526030" cy="1060704"/>
+          </a:xfrm>
+          <a:prstGeom prst="rect">
+            <a:avLst/>
+          </a:prstGeom>
+          <a:noFill/>
+        </p:spPr>
+        <p:txBody>
+          <a:bodyPr wrap="square" anchor="t" lIns="45720" rIns="45720" tIns="27432" bIns="27432">
+            <a:normAutofit/>
+          </a:bodyPr>
+          <a:lstStyle/>
+          <a:p>
+            <a:pPr algn="l"/>
+            <a:r>
+              <a:rPr sz="1100" b="1">
+                <a:solidFill>
+                  <a:srgbClr val="5B3E83"/>
+                </a:solidFill>
+                <a:latin typeface="Bricolage Grotesque"/>
+              </a:rPr>
+              <a:t>marco</a:t>
+            </a:r>
+          </a:p>
+          <a:p>
+            <a:pPr algn="l"/>
+            <a:r>
+              <a:rPr sz="1000">
+                <a:solidFill>
+                  <a:srgbClr val="20242E"/>
+                </a:solidFill>
+                <a:latin typeface="Inter"/>
+              </a:rPr>
+              <a:t>Nos quedan … euros para …</a:t>
+            </a:r>
+          </a:p>
+        </p:txBody>
+      </p:sp>
+      <p:sp>
+        <p:nvSpPr>
+          <p:cNvPr id="27" name="Tarjeta 8"/>
+          <p:cNvSpPr/>
+          <p:nvPr/>
+        </p:nvSpPr>
+        <p:spPr>
+          <a:xfrm>
+            <a:off x="457200" y="5266944"/>
+            <a:ext cx="2708910" cy="1170432"/>
+          </a:xfrm>
+          <a:prstGeom prst="roundRect">
+            <a:avLst>
+              <a:gd name="adj" fmla="val 6000"/>
+            </a:avLst>
+          </a:prstGeom>
+          <a:solidFill>
+            <a:srgbClr val="FFFFFF"/>
+          </a:solidFill>
+          <a:ln w="12700">
+            <a:solidFill>
+              <a:srgbClr val="E4E3DE"/>
+            </a:solidFill>
+          </a:ln>
+          <a:effectLst/>
+        </p:spPr>
+        <p:style>
+          <a:lnRef idx="1">
+            <a:schemeClr val="accent1"/>
+          </a:lnRef>
+          <a:fillRef idx="3">
+            <a:schemeClr val="accent1"/>
+          </a:fillRef>
+          <a:effectRef idx="2">
+            <a:schemeClr val="accent1"/>
+          </a:effectRef>
+          <a:fontRef idx="minor">
+            <a:schemeClr val="lt1"/>
+          </a:fontRef>
+        </p:style>
+        <p:txBody>
+          <a:bodyPr rtlCol="0" anchor="ctr"/>
+          <a:lstStyle/>
+          <a:p/>
+        </p:txBody>
+      </p:sp>
+      <p:sp>
+        <p:nvSpPr>
+          <p:cNvPr id="28" name="TarjetaTxt 8"/>
+          <p:cNvSpPr txBox="1"/>
+          <p:nvPr/>
+        </p:nvSpPr>
+        <p:spPr>
+          <a:xfrm>
+            <a:off x="548640" y="5321808"/>
+            <a:ext cx="2526030" cy="1060704"/>
+          </a:xfrm>
+          <a:prstGeom prst="rect">
+            <a:avLst/>
+          </a:prstGeom>
+          <a:noFill/>
+        </p:spPr>
+        <p:txBody>
+          <a:bodyPr wrap="square" anchor="t" lIns="45720" rIns="45720" tIns="27432" bIns="27432">
+            <a:normAutofit/>
+          </a:bodyPr>
+          <a:lstStyle/>
+          <a:p>
+            <a:pPr algn="l"/>
+            <a:r>
+              <a:rPr sz="1100" b="1">
+                <a:solidFill>
+                  <a:srgbClr val="5B3E83"/>
+                </a:solidFill>
+                <a:latin typeface="Bricolage Grotesque"/>
+              </a:rPr>
+              <a:t>marco</a:t>
+            </a:r>
+          </a:p>
+          <a:p>
+            <a:pPr algn="l"/>
+            <a:r>
+              <a:rPr sz="1000">
+                <a:solidFill>
+                  <a:srgbClr val="20242E"/>
+                </a:solidFill>
+                <a:latin typeface="Inter"/>
+              </a:rPr>
+              <a:t>Por ese precio no vale la pena …</a:t>
+            </a:r>
+          </a:p>
+        </p:txBody>
+      </p:sp>
+    </p:spTree>
+  </p:cSld>
+  <p:clrMapOvr>
+    <a:masterClrMapping/>
+  </p:clrMapOvr>
+</p:sld>
+</file>
+
+<file path=ppt/slides/slide23.xml><?xml version="1.0" encoding="utf-8"?>
+<p:sld xmlns:a="http://schemas.openxmlformats.org/drawingml/2006/main" xmlns:p="http://schemas.openxmlformats.org/presentationml/2006/main" xmlns:r="http://schemas.openxmlformats.org/officeDocument/2006/relationships">
+  <p:cSld>
+    <p:spTree>
+      <p:nvGrpSpPr>
+        <p:cNvPr id="1" name=""/>
+        <p:cNvGrpSpPr/>
+        <p:nvPr/>
+      </p:nvGrpSpPr>
+      <p:grpSpPr/>
+      <p:sp>
+        <p:nvSpPr>
+          <p:cNvPr id="2" name="Fondo"/>
+          <p:cNvSpPr/>
+          <p:nvPr/>
+        </p:nvSpPr>
+        <p:spPr>
+          <a:xfrm>
+            <a:off x="0" y="0"/>
+            <a:ext cx="12191695" cy="6858000"/>
+          </a:xfrm>
+          <a:prstGeom prst="rect">
+            <a:avLst/>
+          </a:prstGeom>
+          <a:solidFill>
+            <a:srgbClr val="FCFBF8"/>
+          </a:solidFill>
+          <a:ln>
+            <a:noFill/>
+          </a:ln>
+          <a:effectLst/>
+        </p:spPr>
+        <p:style>
+          <a:lnRef idx="1">
+            <a:schemeClr val="accent1"/>
+          </a:lnRef>
+          <a:fillRef idx="3">
+            <a:schemeClr val="accent1"/>
+          </a:fillRef>
+          <a:effectRef idx="2">
+            <a:schemeClr val="accent1"/>
+          </a:effectRef>
+          <a:fontRef idx="minor">
+            <a:schemeClr val="lt1"/>
+          </a:fontRef>
+        </p:style>
+        <p:txBody>
+          <a:bodyPr rtlCol="0" anchor="ctr"/>
+          <a:lstStyle/>
+          <a:p/>
+        </p:txBody>
+      </p:sp>
+      <p:sp>
+        <p:nvSpPr>
+          <p:cNvPr id="3" name="Cabecera"/>
+          <p:cNvSpPr/>
+          <p:nvPr/>
+        </p:nvSpPr>
+        <p:spPr>
+          <a:xfrm>
+            <a:off x="0" y="0"/>
+            <a:ext cx="12191695" cy="1078992"/>
+          </a:xfrm>
+          <a:prstGeom prst="rect">
+            <a:avLst/>
+          </a:prstGeom>
+          <a:solidFill>
+            <a:srgbClr val="7C56A9"/>
+          </a:solidFill>
+          <a:ln>
+            <a:noFill/>
+          </a:ln>
+          <a:effectLst/>
+        </p:spPr>
+        <p:style>
+          <a:lnRef idx="1">
+            <a:schemeClr val="accent1"/>
+          </a:lnRef>
+          <a:fillRef idx="3">
+            <a:schemeClr val="accent1"/>
+          </a:fillRef>
+          <a:effectRef idx="2">
+            <a:schemeClr val="accent1"/>
+          </a:effectRef>
+          <a:fontRef idx="minor">
+            <a:schemeClr val="lt1"/>
+          </a:fontRef>
+        </p:style>
+        <p:txBody>
+          <a:bodyPr rtlCol="0" anchor="ctr"/>
+          <a:lstStyle/>
+          <a:p/>
+        </p:txBody>
+      </p:sp>
+      <p:sp>
+        <p:nvSpPr>
+          <p:cNvPr id="4" name="Chip"/>
+          <p:cNvSpPr/>
+          <p:nvPr/>
+        </p:nvSpPr>
+        <p:spPr>
+          <a:xfrm>
+            <a:off x="457200" y="182880"/>
+            <a:ext cx="3017520" cy="292608"/>
+          </a:xfrm>
+          <a:prstGeom prst="roundRect">
+            <a:avLst>
+              <a:gd name="adj" fmla="val 50000"/>
+            </a:avLst>
+          </a:prstGeom>
+          <a:solidFill>
+            <a:srgbClr val="FFFFFF"/>
+          </a:solidFill>
+          <a:ln>
+            <a:noFill/>
+          </a:ln>
+          <a:effectLst/>
+        </p:spPr>
+        <p:style>
+          <a:lnRef idx="1">
+            <a:schemeClr val="accent1"/>
+          </a:lnRef>
+          <a:fillRef idx="3">
+            <a:schemeClr val="accent1"/>
+          </a:fillRef>
+          <a:effectRef idx="2">
+            <a:schemeClr val="accent1"/>
+          </a:effectRef>
+          <a:fontRef idx="minor">
+            <a:schemeClr val="lt1"/>
+          </a:fontRef>
+        </p:style>
+        <p:txBody>
+          <a:bodyPr rtlCol="0" anchor="ctr"/>
+          <a:lstStyle/>
+          <a:p/>
+        </p:txBody>
+      </p:sp>
+      <p:sp>
+        <p:nvSpPr>
+          <p:cNvPr id="5" name="ChipTxt"/>
+          <p:cNvSpPr txBox="1"/>
+          <p:nvPr/>
+        </p:nvSpPr>
+        <p:spPr>
+          <a:xfrm>
+            <a:off x="457200" y="173736"/>
+            <a:ext cx="3017520" cy="310896"/>
+          </a:xfrm>
+          <a:prstGeom prst="rect">
+            <a:avLst/>
+          </a:prstGeom>
+          <a:noFill/>
+        </p:spPr>
+        <p:txBody>
+          <a:bodyPr wrap="square" anchor="ctr" lIns="45720" rIns="45720" tIns="27432" bIns="27432">
+            <a:normAutofit/>
+          </a:bodyPr>
+          <a:lstStyle/>
+          <a:p>
+            <a:pPr algn="ctr"/>
+            <a:r>
+              <a:rPr sz="950" b="1">
+                <a:solidFill>
+                  <a:srgbClr val="5B3E83"/>
+                </a:solidFill>
+                <a:latin typeface="Inter"/>
+              </a:rPr>
+              <a:t>RETO 5 · ONDERHANDELING &amp; DILEMMA</a:t>
+            </a:r>
+          </a:p>
+        </p:txBody>
+      </p:sp>
+      <p:sp>
+        <p:nvSpPr>
+          <p:cNvPr id="6" name="Titulo"/>
+          <p:cNvSpPr txBox="1"/>
+          <p:nvPr/>
+        </p:nvSpPr>
+        <p:spPr>
+          <a:xfrm>
+            <a:off x="457200" y="502920"/>
+            <a:ext cx="8412480" cy="475488"/>
+          </a:xfrm>
+          <a:prstGeom prst="rect">
+            <a:avLst/>
+          </a:prstGeom>
+          <a:noFill/>
+        </p:spPr>
+        <p:txBody>
+          <a:bodyPr wrap="square" anchor="t" lIns="45720" rIns="45720" tIns="27432" bIns="27432">
+            <a:normAutofit/>
+          </a:bodyPr>
+          <a:lstStyle/>
+          <a:p>
+            <a:pPr algn="l"/>
+            <a:r>
+              <a:rPr sz="2700" b="1">
+                <a:solidFill>
+                  <a:srgbClr val="FFFFFF"/>
+                </a:solidFill>
+                <a:latin typeface="Bricolage Grotesque"/>
+              </a:rPr>
+              <a:t>Equipaje de mano</a:t>
+            </a:r>
+          </a:p>
+        </p:txBody>
+      </p:sp>
+      <p:sp>
+        <p:nvSpPr>
+          <p:cNvPr id="7" name="Badges"/>
+          <p:cNvSpPr txBox="1"/>
+          <p:nvPr/>
+        </p:nvSpPr>
+        <p:spPr>
+          <a:xfrm>
+            <a:off x="9052560" y="256032"/>
+            <a:ext cx="2651760" cy="640080"/>
+          </a:xfrm>
+          <a:prstGeom prst="rect">
+            <a:avLst/>
+          </a:prstGeom>
+          <a:noFill/>
+        </p:spPr>
+        <p:txBody>
+          <a:bodyPr wrap="square" anchor="t" lIns="45720" rIns="45720" tIns="27432" bIns="27432">
+            <a:normAutofit/>
+          </a:bodyPr>
+          <a:lstStyle/>
+          <a:p>
+            <a:pPr algn="r"/>
+            <a:r>
+              <a:rPr sz="1000">
+                <a:solidFill>
+                  <a:srgbClr val="EEE8F5"/>
+                </a:solidFill>
+                <a:latin typeface="Inter"/>
+              </a:rPr>
+              <a:t>👨‍👩‍👧 En grupos</a:t>
+            </a:r>
+          </a:p>
+          <a:p>
+            <a:pPr algn="r"/>
+            <a:r>
+              <a:rPr sz="1000">
+                <a:solidFill>
+                  <a:srgbClr val="EEE8F5"/>
+                </a:solidFill>
+                <a:latin typeface="Inter"/>
+              </a:rPr>
+              <a:t>± 15 min · ★★★</a:t>
+            </a:r>
+          </a:p>
+        </p:txBody>
+      </p:sp>
+      <p:sp>
+        <p:nvSpPr>
+          <p:cNvPr id="8" name="Gancho"/>
+          <p:cNvSpPr txBox="1"/>
+          <p:nvPr/>
+        </p:nvSpPr>
+        <p:spPr>
+          <a:xfrm>
+            <a:off x="457200" y="1225296"/>
+            <a:ext cx="11274552" cy="566928"/>
+          </a:xfrm>
+          <a:prstGeom prst="rect">
+            <a:avLst/>
+          </a:prstGeom>
+          <a:noFill/>
+        </p:spPr>
+        <p:txBody>
+          <a:bodyPr wrap="square" anchor="t" lIns="45720" rIns="45720" tIns="27432" bIns="27432">
+            <a:normAutofit/>
+          </a:bodyPr>
+          <a:lstStyle/>
+          <a:p>
+            <a:pPr algn="l"/>
+            <a:r>
+              <a:rPr sz="1600" b="1">
+                <a:solidFill>
+                  <a:srgbClr val="5B3E83"/>
+                </a:solidFill>
+                <a:latin typeface="Bricolage Grotesque"/>
+              </a:rPr>
+              <a:t>Siete kilos. Treinta días. Cuatro personas que no están de acuerdo.</a:t>
+            </a:r>
+          </a:p>
+          <a:p>
+            <a:pPr algn="l"/>
+            <a:r>
+              <a:rPr sz="1100" i="1">
+                <a:solidFill>
+                  <a:srgbClr val="6A6E78"/>
+                </a:solidFill>
+                <a:latin typeface="Inter"/>
+              </a:rPr>
+              <a:t>Zeven kilo. Dertig dagen. Vier mensen die het oneens zijn.</a:t>
+            </a:r>
+          </a:p>
+        </p:txBody>
+      </p:sp>
+      <p:sp>
+        <p:nvSpPr>
+          <p:cNvPr id="9" name="ReglaCaja"/>
+          <p:cNvSpPr/>
+          <p:nvPr/>
+        </p:nvSpPr>
+        <p:spPr>
+          <a:xfrm>
+            <a:off x="457200" y="1847088"/>
+            <a:ext cx="11274552" cy="658368"/>
+          </a:xfrm>
+          <a:prstGeom prst="roundRect">
+            <a:avLst>
+              <a:gd name="adj" fmla="val 5000"/>
+            </a:avLst>
+          </a:prstGeom>
+          <a:solidFill>
+            <a:srgbClr val="FBF3D6"/>
+          </a:solidFill>
+          <a:ln>
+            <a:noFill/>
+          </a:ln>
+          <a:effectLst/>
+        </p:spPr>
+        <p:style>
+          <a:lnRef idx="1">
+            <a:schemeClr val="accent1"/>
+          </a:lnRef>
+          <a:fillRef idx="3">
+            <a:schemeClr val="accent1"/>
+          </a:fillRef>
+          <a:effectRef idx="2">
+            <a:schemeClr val="accent1"/>
+          </a:effectRef>
+          <a:fontRef idx="minor">
+            <a:schemeClr val="lt1"/>
+          </a:fontRef>
+        </p:style>
+        <p:txBody>
+          <a:bodyPr rtlCol="0" anchor="ctr"/>
+          <a:lstStyle/>
+          <a:p/>
+        </p:txBody>
+      </p:sp>
+      <p:sp>
+        <p:nvSpPr>
+          <p:cNvPr id="10" name="ReglaTxt"/>
+          <p:cNvSpPr txBox="1"/>
+          <p:nvPr/>
+        </p:nvSpPr>
+        <p:spPr>
+          <a:xfrm>
+            <a:off x="603504" y="1883664"/>
+            <a:ext cx="10972800" cy="585216"/>
+          </a:xfrm>
+          <a:prstGeom prst="rect">
+            <a:avLst/>
+          </a:prstGeom>
+          <a:noFill/>
+        </p:spPr>
+        <p:txBody>
+          <a:bodyPr wrap="square" anchor="t" lIns="45720" rIns="45720" tIns="27432" bIns="27432">
+            <a:normAutofit/>
+          </a:bodyPr>
+          <a:lstStyle/>
+          <a:p>
+            <a:pPr algn="l"/>
+            <a:r>
+              <a:rPr sz="850" b="1">
+                <a:solidFill>
+                  <a:srgbClr val="B7860B"/>
+                </a:solidFill>
+                <a:latin typeface="Inter"/>
+              </a:rPr>
+              <a:t>LA REGLA DEL RETO</a:t>
+            </a:r>
+          </a:p>
+          <a:p>
+            <a:pPr algn="l"/>
+            <a:r>
+              <a:rPr sz="1100">
+                <a:solidFill>
+                  <a:srgbClr val="20242E"/>
+                </a:solidFill>
+                <a:latin typeface="Inter"/>
+              </a:rPr>
+              <a:t>Zeven kilo, geen gram meer. Elk voorwerp krijgt een «para»-zin die zegt waarvóór het dient — «para el frío de la noche», niet «porque es útil». Zonder «para» blijft het thuis.</a:t>
+            </a:r>
+          </a:p>
+        </p:txBody>
+      </p:sp>
+      <p:sp>
+        <p:nvSpPr>
+          <p:cNvPr id="11" name="Tarjeta 0"/>
+          <p:cNvSpPr/>
+          <p:nvPr/>
+        </p:nvSpPr>
+        <p:spPr>
+          <a:xfrm>
+            <a:off x="457200" y="2670048"/>
+            <a:ext cx="2708910" cy="1170432"/>
+          </a:xfrm>
+          <a:prstGeom prst="roundRect">
+            <a:avLst>
+              <a:gd name="adj" fmla="val 6000"/>
+            </a:avLst>
+          </a:prstGeom>
+          <a:solidFill>
+            <a:srgbClr val="FFFFFF"/>
+          </a:solidFill>
+          <a:ln w="12700">
+            <a:solidFill>
+              <a:srgbClr val="E4E3DE"/>
+            </a:solidFill>
+          </a:ln>
+          <a:effectLst/>
+        </p:spPr>
+        <p:style>
+          <a:lnRef idx="1">
+            <a:schemeClr val="accent1"/>
+          </a:lnRef>
+          <a:fillRef idx="3">
+            <a:schemeClr val="accent1"/>
+          </a:fillRef>
+          <a:effectRef idx="2">
+            <a:schemeClr val="accent1"/>
+          </a:effectRef>
+          <a:fontRef idx="minor">
+            <a:schemeClr val="lt1"/>
+          </a:fontRef>
+        </p:style>
+        <p:txBody>
+          <a:bodyPr rtlCol="0" anchor="ctr"/>
+          <a:lstStyle/>
+          <a:p/>
+        </p:txBody>
+      </p:sp>
+      <p:sp>
+        <p:nvSpPr>
+          <p:cNvPr id="12" name="TarjetaTxt 0"/>
+          <p:cNvSpPr txBox="1"/>
+          <p:nvPr/>
+        </p:nvSpPr>
+        <p:spPr>
+          <a:xfrm>
+            <a:off x="548640" y="2724912"/>
+            <a:ext cx="2526030" cy="1060704"/>
+          </a:xfrm>
+          <a:prstGeom prst="rect">
+            <a:avLst/>
+          </a:prstGeom>
+          <a:noFill/>
+        </p:spPr>
+        <p:txBody>
+          <a:bodyPr wrap="square" anchor="t" lIns="45720" rIns="45720" tIns="27432" bIns="27432">
+            <a:normAutofit/>
+          </a:bodyPr>
+          <a:lstStyle/>
+          <a:p>
+            <a:pPr algn="l"/>
+            <a:r>
+              <a:rPr sz="1100" b="1">
+                <a:solidFill>
+                  <a:srgbClr val="5B3E83"/>
+                </a:solidFill>
+                <a:latin typeface="Bricolage Grotesque"/>
+              </a:rPr>
+              <a:t>El destino</a:t>
+            </a:r>
+          </a:p>
+          <a:p>
+            <a:pPr algn="l"/>
+            <a:r>
+              <a:rPr sz="1000">
+                <a:solidFill>
+                  <a:srgbClr val="20242E"/>
+                </a:solidFill>
+                <a:latin typeface="Inter"/>
+              </a:rPr>
+              <a:t>Del desierto de Atacama a la Patagonia: 35 °C de día en el norte, 0 °C de noche en el sur.</a:t>
+            </a:r>
+          </a:p>
+        </p:txBody>
+      </p:sp>
+      <p:sp>
+        <p:nvSpPr>
+          <p:cNvPr id="13" name="Tarjeta 1"/>
+          <p:cNvSpPr/>
+          <p:nvPr/>
+        </p:nvSpPr>
+        <p:spPr>
+          <a:xfrm>
+            <a:off x="3312414" y="2670048"/>
+            <a:ext cx="2708910" cy="1170432"/>
+          </a:xfrm>
+          <a:prstGeom prst="roundRect">
+            <a:avLst>
+              <a:gd name="adj" fmla="val 6000"/>
+            </a:avLst>
+          </a:prstGeom>
+          <a:solidFill>
+            <a:srgbClr val="FFFFFF"/>
+          </a:solidFill>
+          <a:ln w="12700">
+            <a:solidFill>
+              <a:srgbClr val="E4E3DE"/>
+            </a:solidFill>
+          </a:ln>
+          <a:effectLst/>
+        </p:spPr>
+        <p:style>
+          <a:lnRef idx="1">
+            <a:schemeClr val="accent1"/>
+          </a:lnRef>
+          <a:fillRef idx="3">
+            <a:schemeClr val="accent1"/>
+          </a:fillRef>
+          <a:effectRef idx="2">
+            <a:schemeClr val="accent1"/>
+          </a:effectRef>
+          <a:fontRef idx="minor">
+            <a:schemeClr val="lt1"/>
+          </a:fontRef>
+        </p:style>
+        <p:txBody>
+          <a:bodyPr rtlCol="0" anchor="ctr"/>
+          <a:lstStyle/>
+          <a:p/>
+        </p:txBody>
+      </p:sp>
+      <p:sp>
+        <p:nvSpPr>
+          <p:cNvPr id="14" name="TarjetaTxt 1"/>
+          <p:cNvSpPr txBox="1"/>
+          <p:nvPr/>
+        </p:nvSpPr>
+        <p:spPr>
+          <a:xfrm>
+            <a:off x="3403854" y="2724912"/>
+            <a:ext cx="2526030" cy="1060704"/>
+          </a:xfrm>
+          <a:prstGeom prst="rect">
+            <a:avLst/>
+          </a:prstGeom>
+          <a:noFill/>
+        </p:spPr>
+        <p:txBody>
+          <a:bodyPr wrap="square" anchor="t" lIns="45720" rIns="45720" tIns="27432" bIns="27432">
+            <a:normAutofit/>
+          </a:bodyPr>
+          <a:lstStyle/>
+          <a:p>
+            <a:pPr algn="l"/>
+            <a:r>
+              <a:rPr sz="1100" b="1">
+                <a:solidFill>
+                  <a:srgbClr val="5B3E83"/>
+                </a:solidFill>
+                <a:latin typeface="Bricolage Grotesque"/>
+              </a:rPr>
+              <a:t>La mochila</a:t>
+            </a:r>
+          </a:p>
+          <a:p>
+            <a:pPr algn="l"/>
+            <a:r>
+              <a:rPr sz="1000">
+                <a:solidFill>
+                  <a:srgbClr val="20242E"/>
+                </a:solidFill>
+                <a:latin typeface="Inter"/>
+              </a:rPr>
+              <a:t>dos pantalones (900 g) · cuatro camisetas (600 g) · un jersey de lana (500 g) · un chubasquero (350 g)</a:t>
+            </a:r>
+          </a:p>
+        </p:txBody>
+      </p:sp>
+      <p:sp>
+        <p:nvSpPr>
+          <p:cNvPr id="15" name="Tarjeta 2"/>
+          <p:cNvSpPr/>
+          <p:nvPr/>
+        </p:nvSpPr>
+        <p:spPr>
+          <a:xfrm>
+            <a:off x="6167628" y="2670048"/>
+            <a:ext cx="2708910" cy="1170432"/>
+          </a:xfrm>
+          <a:prstGeom prst="roundRect">
+            <a:avLst>
+              <a:gd name="adj" fmla="val 6000"/>
+            </a:avLst>
+          </a:prstGeom>
+          <a:solidFill>
+            <a:srgbClr val="FFFFFF"/>
+          </a:solidFill>
+          <a:ln w="12700">
+            <a:solidFill>
+              <a:srgbClr val="E4E3DE"/>
+            </a:solidFill>
+          </a:ln>
+          <a:effectLst/>
+        </p:spPr>
+        <p:style>
+          <a:lnRef idx="1">
+            <a:schemeClr val="accent1"/>
+          </a:lnRef>
+          <a:fillRef idx="3">
+            <a:schemeClr val="accent1"/>
+          </a:fillRef>
+          <a:effectRef idx="2">
+            <a:schemeClr val="accent1"/>
+          </a:effectRef>
+          <a:fontRef idx="minor">
+            <a:schemeClr val="lt1"/>
+          </a:fontRef>
+        </p:style>
+        <p:txBody>
+          <a:bodyPr rtlCol="0" anchor="ctr"/>
+          <a:lstStyle/>
+          <a:p/>
+        </p:txBody>
+      </p:sp>
+      <p:sp>
+        <p:nvSpPr>
+          <p:cNvPr id="16" name="TarjetaTxt 2"/>
+          <p:cNvSpPr txBox="1"/>
+          <p:nvPr/>
+        </p:nvSpPr>
+        <p:spPr>
+          <a:xfrm>
+            <a:off x="6259068" y="2724912"/>
+            <a:ext cx="2526030" cy="1060704"/>
+          </a:xfrm>
+          <a:prstGeom prst="rect">
+            <a:avLst/>
+          </a:prstGeom>
+          <a:noFill/>
+        </p:spPr>
+        <p:txBody>
+          <a:bodyPr wrap="square" anchor="t" lIns="45720" rIns="45720" tIns="27432" bIns="27432">
+            <a:normAutofit/>
+          </a:bodyPr>
+          <a:lstStyle/>
+          <a:p>
+            <a:pPr algn="l"/>
+            <a:r>
+              <a:rPr sz="1100" b="1">
+                <a:solidFill>
+                  <a:srgbClr val="5B3E83"/>
+                </a:solidFill>
+                <a:latin typeface="Bricolage Grotesque"/>
+              </a:rPr>
+              <a:t>La mochila</a:t>
+            </a:r>
+          </a:p>
+          <a:p>
+            <a:pPr algn="l"/>
+            <a:r>
+              <a:rPr sz="1000">
+                <a:solidFill>
+                  <a:srgbClr val="20242E"/>
+                </a:solidFill>
+                <a:latin typeface="Inter"/>
+              </a:rPr>
+              <a:t>botas de montaña (1200 g) · chanclas (200 g) · saco de dormir fino (700 g) · toalla de microfibra (150 g)</a:t>
+            </a:r>
+          </a:p>
+        </p:txBody>
+      </p:sp>
+      <p:sp>
+        <p:nvSpPr>
+          <p:cNvPr id="17" name="Tarjeta 3"/>
+          <p:cNvSpPr/>
+          <p:nvPr/>
+        </p:nvSpPr>
+        <p:spPr>
+          <a:xfrm>
+            <a:off x="9022842" y="2670048"/>
+            <a:ext cx="2708910" cy="1170432"/>
+          </a:xfrm>
+          <a:prstGeom prst="roundRect">
+            <a:avLst>
+              <a:gd name="adj" fmla="val 6000"/>
+            </a:avLst>
+          </a:prstGeom>
+          <a:solidFill>
+            <a:srgbClr val="FFFFFF"/>
+          </a:solidFill>
+          <a:ln w="12700">
+            <a:solidFill>
+              <a:srgbClr val="E4E3DE"/>
+            </a:solidFill>
+          </a:ln>
+          <a:effectLst/>
+        </p:spPr>
+        <p:style>
+          <a:lnRef idx="1">
+            <a:schemeClr val="accent1"/>
+          </a:lnRef>
+          <a:fillRef idx="3">
+            <a:schemeClr val="accent1"/>
+          </a:fillRef>
+          <a:effectRef idx="2">
+            <a:schemeClr val="accent1"/>
+          </a:effectRef>
+          <a:fontRef idx="minor">
+            <a:schemeClr val="lt1"/>
+          </a:fontRef>
+        </p:style>
+        <p:txBody>
+          <a:bodyPr rtlCol="0" anchor="ctr"/>
+          <a:lstStyle/>
+          <a:p/>
+        </p:txBody>
+      </p:sp>
+      <p:sp>
+        <p:nvSpPr>
+          <p:cNvPr id="18" name="TarjetaTxt 3"/>
+          <p:cNvSpPr txBox="1"/>
+          <p:nvPr/>
+        </p:nvSpPr>
+        <p:spPr>
+          <a:xfrm>
+            <a:off x="9114282" y="2724912"/>
+            <a:ext cx="2526030" cy="1060704"/>
+          </a:xfrm>
+          <a:prstGeom prst="rect">
+            <a:avLst/>
+          </a:prstGeom>
+          <a:noFill/>
+        </p:spPr>
+        <p:txBody>
+          <a:bodyPr wrap="square" anchor="t" lIns="45720" rIns="45720" tIns="27432" bIns="27432">
+            <a:normAutofit/>
+          </a:bodyPr>
+          <a:lstStyle/>
+          <a:p>
+            <a:pPr algn="l"/>
+            <a:r>
+              <a:rPr sz="1100" b="1">
+                <a:solidFill>
+                  <a:srgbClr val="5B3E83"/>
+                </a:solidFill>
+                <a:latin typeface="Bricolage Grotesque"/>
+              </a:rPr>
+              <a:t>La mochila</a:t>
+            </a:r>
+          </a:p>
+          <a:p>
+            <a:pPr algn="l"/>
+            <a:r>
+              <a:rPr sz="1000">
+                <a:solidFill>
+                  <a:srgbClr val="20242E"/>
+                </a:solidFill>
+                <a:latin typeface="Inter"/>
+              </a:rPr>
+              <a:t>neceser completo (600 g) · botiquín (300 g) · cargador y cables (250 g) · libro de papel (400 g)</a:t>
+            </a:r>
+          </a:p>
+        </p:txBody>
+      </p:sp>
+      <p:sp>
+        <p:nvSpPr>
+          <p:cNvPr id="19" name="Tarjeta 4"/>
+          <p:cNvSpPr/>
+          <p:nvPr/>
+        </p:nvSpPr>
+        <p:spPr>
+          <a:xfrm>
+            <a:off x="457200" y="3968496"/>
+            <a:ext cx="2708910" cy="1170432"/>
+          </a:xfrm>
+          <a:prstGeom prst="roundRect">
+            <a:avLst>
+              <a:gd name="adj" fmla="val 6000"/>
+            </a:avLst>
+          </a:prstGeom>
+          <a:solidFill>
+            <a:srgbClr val="FFFFFF"/>
+          </a:solidFill>
+          <a:ln w="12700">
+            <a:solidFill>
+              <a:srgbClr val="E4E3DE"/>
+            </a:solidFill>
+          </a:ln>
+          <a:effectLst/>
+        </p:spPr>
+        <p:style>
+          <a:lnRef idx="1">
+            <a:schemeClr val="accent1"/>
+          </a:lnRef>
+          <a:fillRef idx="3">
+            <a:schemeClr val="accent1"/>
+          </a:fillRef>
+          <a:effectRef idx="2">
+            <a:schemeClr val="accent1"/>
+          </a:effectRef>
+          <a:fontRef idx="minor">
+            <a:schemeClr val="lt1"/>
+          </a:fontRef>
+        </p:style>
+        <p:txBody>
+          <a:bodyPr rtlCol="0" anchor="ctr"/>
+          <a:lstStyle/>
+          <a:p/>
+        </p:txBody>
+      </p:sp>
+      <p:sp>
+        <p:nvSpPr>
+          <p:cNvPr id="20" name="TarjetaTxt 4"/>
+          <p:cNvSpPr txBox="1"/>
+          <p:nvPr/>
+        </p:nvSpPr>
+        <p:spPr>
+          <a:xfrm>
+            <a:off x="548640" y="4023360"/>
+            <a:ext cx="2526030" cy="1060704"/>
+          </a:xfrm>
+          <a:prstGeom prst="rect">
+            <a:avLst/>
+          </a:prstGeom>
+          <a:noFill/>
+        </p:spPr>
+        <p:txBody>
+          <a:bodyPr wrap="square" anchor="t" lIns="45720" rIns="45720" tIns="27432" bIns="27432">
+            <a:normAutofit/>
+          </a:bodyPr>
+          <a:lstStyle/>
+          <a:p>
+            <a:pPr algn="l"/>
+            <a:r>
+              <a:rPr sz="1100" b="1">
+                <a:solidFill>
+                  <a:srgbClr val="5B3E83"/>
+                </a:solidFill>
+                <a:latin typeface="Bricolage Grotesque"/>
+              </a:rPr>
+              <a:t>La mochila</a:t>
+            </a:r>
+          </a:p>
+          <a:p>
+            <a:pPr algn="l"/>
+            <a:r>
+              <a:rPr sz="1000">
+                <a:solidFill>
+                  <a:srgbClr val="20242E"/>
+                </a:solidFill>
+                <a:latin typeface="Inter"/>
+              </a:rPr>
+              <a:t>cámara pequeña (450 g) · candado y cuerda (200 g) · bañador (150 g) · gorro y guantes (250 g)</a:t>
+            </a:r>
+          </a:p>
+        </p:txBody>
+      </p:sp>
+      <p:sp>
+        <p:nvSpPr>
+          <p:cNvPr id="21" name="Tarjeta 5"/>
+          <p:cNvSpPr/>
+          <p:nvPr/>
+        </p:nvSpPr>
+        <p:spPr>
+          <a:xfrm>
+            <a:off x="3312414" y="3968496"/>
+            <a:ext cx="2708910" cy="1170432"/>
+          </a:xfrm>
+          <a:prstGeom prst="roundRect">
+            <a:avLst>
+              <a:gd name="adj" fmla="val 6000"/>
+            </a:avLst>
+          </a:prstGeom>
+          <a:solidFill>
+            <a:srgbClr val="FFFFFF"/>
+          </a:solidFill>
+          <a:ln w="12700">
+            <a:solidFill>
+              <a:srgbClr val="E4E3DE"/>
+            </a:solidFill>
+          </a:ln>
+          <a:effectLst/>
+        </p:spPr>
+        <p:style>
+          <a:lnRef idx="1">
+            <a:schemeClr val="accent1"/>
+          </a:lnRef>
+          <a:fillRef idx="3">
+            <a:schemeClr val="accent1"/>
+          </a:fillRef>
+          <a:effectRef idx="2">
+            <a:schemeClr val="accent1"/>
+          </a:effectRef>
+          <a:fontRef idx="minor">
+            <a:schemeClr val="lt1"/>
+          </a:fontRef>
+        </p:style>
+        <p:txBody>
+          <a:bodyPr rtlCol="0" anchor="ctr"/>
+          <a:lstStyle/>
+          <a:p/>
+        </p:txBody>
+      </p:sp>
+      <p:sp>
+        <p:nvSpPr>
+          <p:cNvPr id="22" name="TarjetaTxt 5"/>
+          <p:cNvSpPr txBox="1"/>
+          <p:nvPr/>
+        </p:nvSpPr>
+        <p:spPr>
+          <a:xfrm>
+            <a:off x="3403854" y="4023360"/>
+            <a:ext cx="2526030" cy="1060704"/>
+          </a:xfrm>
+          <a:prstGeom prst="rect">
+            <a:avLst/>
+          </a:prstGeom>
+          <a:noFill/>
+        </p:spPr>
+        <p:txBody>
+          <a:bodyPr wrap="square" anchor="t" lIns="45720" rIns="45720" tIns="27432" bIns="27432">
+            <a:normAutofit/>
+          </a:bodyPr>
+          <a:lstStyle/>
+          <a:p>
+            <a:pPr algn="l"/>
+            <a:r>
+              <a:rPr sz="1100" b="1">
+                <a:solidFill>
+                  <a:srgbClr val="5B3E83"/>
+                </a:solidFill>
+                <a:latin typeface="Bricolage Grotesque"/>
+              </a:rPr>
+              <a:t>marco</a:t>
+            </a:r>
+          </a:p>
+          <a:p>
+            <a:pPr algn="l"/>
+            <a:r>
+              <a:rPr sz="1000">
+                <a:solidFill>
+                  <a:srgbClr val="20242E"/>
+                </a:solidFill>
+                <a:latin typeface="Inter"/>
+              </a:rPr>
+              <a:t>Llevo … para …</a:t>
+            </a:r>
+          </a:p>
+        </p:txBody>
+      </p:sp>
+      <p:sp>
+        <p:nvSpPr>
+          <p:cNvPr id="23" name="Tarjeta 6"/>
+          <p:cNvSpPr/>
+          <p:nvPr/>
+        </p:nvSpPr>
+        <p:spPr>
+          <a:xfrm>
+            <a:off x="6167628" y="3968496"/>
+            <a:ext cx="2708910" cy="1170432"/>
+          </a:xfrm>
+          <a:prstGeom prst="roundRect">
+            <a:avLst>
+              <a:gd name="adj" fmla="val 6000"/>
+            </a:avLst>
+          </a:prstGeom>
+          <a:solidFill>
+            <a:srgbClr val="FFFFFF"/>
+          </a:solidFill>
+          <a:ln w="12700">
+            <a:solidFill>
+              <a:srgbClr val="E4E3DE"/>
+            </a:solidFill>
+          </a:ln>
+          <a:effectLst/>
+        </p:spPr>
+        <p:style>
+          <a:lnRef idx="1">
+            <a:schemeClr val="accent1"/>
+          </a:lnRef>
+          <a:fillRef idx="3">
+            <a:schemeClr val="accent1"/>
+          </a:fillRef>
+          <a:effectRef idx="2">
+            <a:schemeClr val="accent1"/>
+          </a:effectRef>
+          <a:fontRef idx="minor">
+            <a:schemeClr val="lt1"/>
+          </a:fontRef>
+        </p:style>
+        <p:txBody>
+          <a:bodyPr rtlCol="0" anchor="ctr"/>
+          <a:lstStyle/>
+          <a:p/>
+        </p:txBody>
+      </p:sp>
+      <p:sp>
+        <p:nvSpPr>
+          <p:cNvPr id="24" name="TarjetaTxt 6"/>
+          <p:cNvSpPr txBox="1"/>
+          <p:nvPr/>
+        </p:nvSpPr>
+        <p:spPr>
+          <a:xfrm>
+            <a:off x="6259068" y="4023360"/>
+            <a:ext cx="2526030" cy="1060704"/>
+          </a:xfrm>
+          <a:prstGeom prst="rect">
+            <a:avLst/>
+          </a:prstGeom>
+          <a:noFill/>
+        </p:spPr>
+        <p:txBody>
+          <a:bodyPr wrap="square" anchor="t" lIns="45720" rIns="45720" tIns="27432" bIns="27432">
+            <a:normAutofit/>
+          </a:bodyPr>
+          <a:lstStyle/>
+          <a:p>
+            <a:pPr algn="l"/>
+            <a:r>
+              <a:rPr sz="1100" b="1">
+                <a:solidFill>
+                  <a:srgbClr val="5B3E83"/>
+                </a:solidFill>
+                <a:latin typeface="Bricolage Grotesque"/>
+              </a:rPr>
+              <a:t>marco</a:t>
+            </a:r>
+          </a:p>
+          <a:p>
+            <a:pPr algn="l"/>
+            <a:r>
+              <a:rPr sz="1000">
+                <a:solidFill>
+                  <a:srgbClr val="20242E"/>
+                </a:solidFill>
+                <a:latin typeface="Inter"/>
+              </a:rPr>
+              <a:t>Sin … no puedo, porque …</a:t>
+            </a:r>
+          </a:p>
+        </p:txBody>
+      </p:sp>
+      <p:sp>
+        <p:nvSpPr>
+          <p:cNvPr id="25" name="Tarjeta 7"/>
+          <p:cNvSpPr/>
+          <p:nvPr/>
+        </p:nvSpPr>
+        <p:spPr>
+          <a:xfrm>
+            <a:off x="9022842" y="3968496"/>
+            <a:ext cx="2708910" cy="1170432"/>
+          </a:xfrm>
+          <a:prstGeom prst="roundRect">
+            <a:avLst>
+              <a:gd name="adj" fmla="val 6000"/>
+            </a:avLst>
+          </a:prstGeom>
+          <a:solidFill>
+            <a:srgbClr val="FFFFFF"/>
+          </a:solidFill>
+          <a:ln w="12700">
+            <a:solidFill>
+              <a:srgbClr val="E4E3DE"/>
+            </a:solidFill>
+          </a:ln>
+          <a:effectLst/>
+        </p:spPr>
+        <p:style>
+          <a:lnRef idx="1">
+            <a:schemeClr val="accent1"/>
+          </a:lnRef>
+          <a:fillRef idx="3">
+            <a:schemeClr val="accent1"/>
+          </a:fillRef>
+          <a:effectRef idx="2">
+            <a:schemeClr val="accent1"/>
+          </a:effectRef>
+          <a:fontRef idx="minor">
+            <a:schemeClr val="lt1"/>
+          </a:fontRef>
+        </p:style>
+        <p:txBody>
+          <a:bodyPr rtlCol="0" anchor="ctr"/>
+          <a:lstStyle/>
+          <a:p/>
+        </p:txBody>
+      </p:sp>
+      <p:sp>
+        <p:nvSpPr>
+          <p:cNvPr id="26" name="TarjetaTxt 7"/>
+          <p:cNvSpPr txBox="1"/>
+          <p:nvPr/>
+        </p:nvSpPr>
+        <p:spPr>
+          <a:xfrm>
+            <a:off x="9114282" y="4023360"/>
+            <a:ext cx="2526030" cy="1060704"/>
+          </a:xfrm>
+          <a:prstGeom prst="rect">
+            <a:avLst/>
+          </a:prstGeom>
+          <a:noFill/>
+        </p:spPr>
+        <p:txBody>
+          <a:bodyPr wrap="square" anchor="t" lIns="45720" rIns="45720" tIns="27432" bIns="27432">
+            <a:normAutofit/>
+          </a:bodyPr>
+          <a:lstStyle/>
+          <a:p>
+            <a:pPr algn="l"/>
+            <a:r>
+              <a:rPr sz="1100" b="1">
+                <a:solidFill>
+                  <a:srgbClr val="5B3E83"/>
+                </a:solidFill>
+                <a:latin typeface="Bricolage Grotesque"/>
+              </a:rPr>
+              <a:t>marco</a:t>
+            </a:r>
+          </a:p>
+          <a:p>
+            <a:pPr algn="l"/>
+            <a:r>
+              <a:rPr sz="1000">
+                <a:solidFill>
+                  <a:srgbClr val="20242E"/>
+                </a:solidFill>
+                <a:latin typeface="Inter"/>
+              </a:rPr>
+              <a:t>Eso lo dejamos: para … ya tenemos …</a:t>
+            </a:r>
+          </a:p>
+        </p:txBody>
+      </p:sp>
+      <p:sp>
+        <p:nvSpPr>
+          <p:cNvPr id="27" name="Tarjeta 8"/>
+          <p:cNvSpPr/>
+          <p:nvPr/>
+        </p:nvSpPr>
+        <p:spPr>
+          <a:xfrm>
+            <a:off x="457200" y="5266944"/>
+            <a:ext cx="2708910" cy="1170432"/>
+          </a:xfrm>
+          <a:prstGeom prst="roundRect">
+            <a:avLst>
+              <a:gd name="adj" fmla="val 6000"/>
+            </a:avLst>
+          </a:prstGeom>
+          <a:solidFill>
+            <a:srgbClr val="FFFFFF"/>
+          </a:solidFill>
+          <a:ln w="12700">
+            <a:solidFill>
+              <a:srgbClr val="E4E3DE"/>
+            </a:solidFill>
+          </a:ln>
+          <a:effectLst/>
+        </p:spPr>
+        <p:style>
+          <a:lnRef idx="1">
+            <a:schemeClr val="accent1"/>
+          </a:lnRef>
+          <a:fillRef idx="3">
+            <a:schemeClr val="accent1"/>
+          </a:fillRef>
+          <a:effectRef idx="2">
+            <a:schemeClr val="accent1"/>
+          </a:effectRef>
+          <a:fontRef idx="minor">
+            <a:schemeClr val="lt1"/>
+          </a:fontRef>
+        </p:style>
+        <p:txBody>
+          <a:bodyPr rtlCol="0" anchor="ctr"/>
+          <a:lstStyle/>
+          <a:p/>
+        </p:txBody>
+      </p:sp>
+      <p:sp>
+        <p:nvSpPr>
+          <p:cNvPr id="28" name="TarjetaTxt 8"/>
+          <p:cNvSpPr txBox="1"/>
+          <p:nvPr/>
+        </p:nvSpPr>
+        <p:spPr>
+          <a:xfrm>
+            <a:off x="548640" y="5321808"/>
+            <a:ext cx="2526030" cy="1060704"/>
+          </a:xfrm>
+          <a:prstGeom prst="rect">
+            <a:avLst/>
+          </a:prstGeom>
+          <a:noFill/>
+        </p:spPr>
+        <p:txBody>
+          <a:bodyPr wrap="square" anchor="t" lIns="45720" rIns="45720" tIns="27432" bIns="27432">
+            <a:normAutofit/>
+          </a:bodyPr>
+          <a:lstStyle/>
+          <a:p>
+            <a:pPr algn="l"/>
+            <a:r>
+              <a:rPr sz="1100" b="1">
+                <a:solidFill>
+                  <a:srgbClr val="5B3E83"/>
+                </a:solidFill>
+                <a:latin typeface="Bricolage Grotesque"/>
+              </a:rPr>
+              <a:t>marco</a:t>
+            </a:r>
+          </a:p>
+          <a:p>
+            <a:pPr algn="l"/>
+            <a:r>
+              <a:rPr sz="1000">
+                <a:solidFill>
+                  <a:srgbClr val="20242E"/>
+                </a:solidFill>
+                <a:latin typeface="Inter"/>
+              </a:rPr>
+              <a:t>¿Y para qué lo quieres exactamente?</a:t>
+            </a:r>
+          </a:p>
+        </p:txBody>
+      </p:sp>
+      <p:sp>
+        <p:nvSpPr>
+          <p:cNvPr id="29" name="Tarjeta 9"/>
+          <p:cNvSpPr/>
+          <p:nvPr/>
+        </p:nvSpPr>
+        <p:spPr>
+          <a:xfrm>
+            <a:off x="3312414" y="5266944"/>
+            <a:ext cx="2708910" cy="1170432"/>
+          </a:xfrm>
+          <a:prstGeom prst="roundRect">
+            <a:avLst>
+              <a:gd name="adj" fmla="val 6000"/>
+            </a:avLst>
+          </a:prstGeom>
+          <a:solidFill>
+            <a:srgbClr val="FFFFFF"/>
+          </a:solidFill>
+          <a:ln w="12700">
+            <a:solidFill>
+              <a:srgbClr val="E4E3DE"/>
+            </a:solidFill>
+          </a:ln>
+          <a:effectLst/>
+        </p:spPr>
+        <p:style>
+          <a:lnRef idx="1">
+            <a:schemeClr val="accent1"/>
+          </a:lnRef>
+          <a:fillRef idx="3">
+            <a:schemeClr val="accent1"/>
+          </a:fillRef>
+          <a:effectRef idx="2">
+            <a:schemeClr val="accent1"/>
+          </a:effectRef>
+          <a:fontRef idx="minor">
+            <a:schemeClr val="lt1"/>
+          </a:fontRef>
+        </p:style>
+        <p:txBody>
+          <a:bodyPr rtlCol="0" anchor="ctr"/>
+          <a:lstStyle/>
+          <a:p/>
+        </p:txBody>
+      </p:sp>
+      <p:sp>
+        <p:nvSpPr>
+          <p:cNvPr id="30" name="TarjetaTxt 9"/>
+          <p:cNvSpPr txBox="1"/>
+          <p:nvPr/>
+        </p:nvSpPr>
+        <p:spPr>
+          <a:xfrm>
+            <a:off x="3403854" y="5321808"/>
+            <a:ext cx="2526030" cy="1060704"/>
+          </a:xfrm>
+          <a:prstGeom prst="rect">
+            <a:avLst/>
+          </a:prstGeom>
+          <a:noFill/>
+        </p:spPr>
+        <p:txBody>
+          <a:bodyPr wrap="square" anchor="t" lIns="45720" rIns="45720" tIns="27432" bIns="27432">
+            <a:normAutofit/>
+          </a:bodyPr>
+          <a:lstStyle/>
+          <a:p>
+            <a:pPr algn="l"/>
+            <a:r>
+              <a:rPr sz="1100" b="1">
+                <a:solidFill>
+                  <a:srgbClr val="5B3E83"/>
+                </a:solidFill>
+                <a:latin typeface="Bricolage Grotesque"/>
+              </a:rPr>
+              <a:t>marco</a:t>
+            </a:r>
+          </a:p>
+          <a:p>
+            <a:pPr algn="l"/>
+            <a:r>
+              <a:rPr sz="1000">
+                <a:solidFill>
+                  <a:srgbClr val="20242E"/>
+                </a:solidFill>
+                <a:latin typeface="Inter"/>
+              </a:rPr>
+              <a:t>Nos pasamos de … gramos. ¿Qué quitamos?</a:t>
+            </a:r>
+          </a:p>
+        </p:txBody>
+      </p:sp>
+    </p:spTree>
+  </p:cSld>
+  <p:clrMapOvr>
+    <a:masterClrMapping/>
+  </p:clrMapOvr>
+</p:sld>
+</file>
+
 <file path=ppt/slides/slide3.xml><?xml version="1.0" encoding="utf-8"?>
 <p:sld xmlns:a="http://schemas.openxmlformats.org/drawingml/2006/main" xmlns:p="http://schemas.openxmlformats.org/presentationml/2006/main" xmlns:r="http://schemas.openxmlformats.org/officeDocument/2006/relationships">
   <p:cSld>
